--- a/deck/KIRIM-pitch-deck.pptx
+++ b/deck/KIRIM-pitch-deck.pptx
@@ -3320,7 +3320,7 @@
         <p:spPr>
           <a:xfrm>
             <a:off x="777240" y="5806440"/>
-            <a:ext cx="10637215" cy="457200"/>
+            <a:ext cx="5486400" cy="457200"/>
           </a:xfrm>
           <a:prstGeom prst="rect">
             <a:avLst/>
@@ -3349,6 +3349,140 @@
                 <a:latin typeface="Consolas"/>
               </a:rPr>
               <a:t>Less blind trust. More visible proof.</a:t>
+            </a:r>
+          </a:p>
+        </p:txBody>
+      </p:sp>
+      <p:pic>
+        <p:nvPicPr>
+          <p:cNvPr id="7" name="Picture 6" descr="ripple.png"/>
+          <p:cNvPicPr>
+            <a:picLocks noChangeAspect="1"/>
+          </p:cNvPicPr>
+          <p:nvPr/>
+        </p:nvPicPr>
+        <p:blipFill>
+          <a:blip r:embed="rId2"/>
+          <a:stretch>
+            <a:fillRect/>
+          </a:stretch>
+        </p:blipFill>
+        <p:spPr>
+          <a:xfrm>
+            <a:off x="10345676" y="5687568"/>
+            <a:ext cx="1068779" cy="274320"/>
+          </a:xfrm>
+          <a:prstGeom prst="rect">
+            <a:avLst/>
+          </a:prstGeom>
+        </p:spPr>
+      </p:pic>
+      <p:sp>
+        <p:nvSpPr>
+          <p:cNvPr id="8" name="Rectangle 7"/>
+          <p:cNvSpPr/>
+          <p:nvPr/>
+        </p:nvSpPr>
+        <p:spPr>
+          <a:xfrm>
+            <a:off x="10089644" y="5669280"/>
+            <a:ext cx="9525" cy="310896"/>
+          </a:xfrm>
+          <a:prstGeom prst="rect">
+            <a:avLst/>
+          </a:prstGeom>
+          <a:solidFill>
+            <a:srgbClr val="262119"/>
+          </a:solidFill>
+          <a:ln>
+            <a:noFill/>
+          </a:ln>
+          <a:effectLst/>
+        </p:spPr>
+        <p:style>
+          <a:lnRef idx="1">
+            <a:schemeClr val="accent1"/>
+          </a:lnRef>
+          <a:fillRef idx="3">
+            <a:schemeClr val="accent1"/>
+          </a:fillRef>
+          <a:effectRef idx="2">
+            <a:schemeClr val="accent1"/>
+          </a:effectRef>
+          <a:fontRef idx="minor">
+            <a:schemeClr val="lt1"/>
+          </a:fontRef>
+        </p:style>
+        <p:txBody>
+          <a:bodyPr rtlCol="0" anchor="ctr"/>
+          <a:lstStyle/>
+          <a:p>
+            <a:pPr algn="ctr"/>
+          </a:p>
+        </p:txBody>
+      </p:sp>
+      <p:pic>
+        <p:nvPicPr>
+          <p:cNvPr id="9" name="Picture 8" descr="singhacks.png"/>
+          <p:cNvPicPr>
+            <a:picLocks noChangeAspect="1"/>
+          </p:cNvPicPr>
+          <p:nvPr/>
+        </p:nvPicPr>
+        <p:blipFill>
+          <a:blip r:embed="rId3"/>
+          <a:stretch>
+            <a:fillRect/>
+          </a:stretch>
+        </p:blipFill>
+        <p:spPr>
+          <a:xfrm>
+            <a:off x="9172631" y="5669280"/>
+            <a:ext cx="660981" cy="310896"/>
+          </a:xfrm>
+          <a:prstGeom prst="rect">
+            <a:avLst/>
+          </a:prstGeom>
+        </p:spPr>
+      </p:pic>
+      <p:sp>
+        <p:nvSpPr>
+          <p:cNvPr id="10" name="TextBox 9"/>
+          <p:cNvSpPr txBox="1"/>
+          <p:nvPr/>
+        </p:nvSpPr>
+        <p:spPr>
+          <a:xfrm>
+            <a:off x="7938191" y="5715000"/>
+            <a:ext cx="1051560" cy="274320"/>
+          </a:xfrm>
+          <a:prstGeom prst="rect">
+            <a:avLst/>
+          </a:prstGeom>
+          <a:noFill/>
+        </p:spPr>
+        <p:txBody>
+          <a:bodyPr wrap="square" lIns="0" rIns="0" tIns="0" bIns="0" anchor="t">
+            <a:spAutoFit/>
+          </a:bodyPr>
+          <a:lstStyle/>
+          <a:p>
+            <a:pPr algn="r">
+              <a:lnSpc>
+                <a:spcPct val="135000"/>
+              </a:lnSpc>
+              <a:spcAft>
+                <a:spcPts val="0"/>
+              </a:spcAft>
+            </a:pPr>
+            <a:r>
+              <a:rPr sz="900" b="0" i="0" spc="16">
+                <a:solidFill>
+                  <a:srgbClr val="7D766A"/>
+                </a:solidFill>
+                <a:latin typeface="Consolas"/>
+              </a:rPr>
+              <a:t>BUILT FOR</a:t>
             </a:r>
           </a:p>
         </p:txBody>
@@ -8363,7 +8497,7 @@
         <p:spPr>
           <a:xfrm>
             <a:off x="777240" y="5349240"/>
-            <a:ext cx="10607040" cy="548640"/>
+            <a:ext cx="6400800" cy="548640"/>
           </a:xfrm>
           <a:prstGeom prst="rect">
             <a:avLst/>
@@ -8392,6 +8526,140 @@
                 <a:latin typeface="Consolas"/>
               </a:rPr>
               <a:t>KIRIM  ·  LESS BLIND TRUST. MORE VISIBLE PROOF.</a:t>
+            </a:r>
+          </a:p>
+        </p:txBody>
+      </p:sp>
+      <p:pic>
+        <p:nvPicPr>
+          <p:cNvPr id="6" name="Picture 5" descr="ripple.png"/>
+          <p:cNvPicPr>
+            <a:picLocks noChangeAspect="1"/>
+          </p:cNvPicPr>
+          <p:nvPr/>
+        </p:nvPicPr>
+        <p:blipFill>
+          <a:blip r:embed="rId2"/>
+          <a:stretch>
+            <a:fillRect/>
+          </a:stretch>
+        </p:blipFill>
+        <p:spPr>
+          <a:xfrm>
+            <a:off x="10345676" y="5285232"/>
+            <a:ext cx="1068779" cy="274320"/>
+          </a:xfrm>
+          <a:prstGeom prst="rect">
+            <a:avLst/>
+          </a:prstGeom>
+        </p:spPr>
+      </p:pic>
+      <p:sp>
+        <p:nvSpPr>
+          <p:cNvPr id="7" name="Rectangle 6"/>
+          <p:cNvSpPr/>
+          <p:nvPr/>
+        </p:nvSpPr>
+        <p:spPr>
+          <a:xfrm>
+            <a:off x="10089644" y="5266944"/>
+            <a:ext cx="9525" cy="310896"/>
+          </a:xfrm>
+          <a:prstGeom prst="rect">
+            <a:avLst/>
+          </a:prstGeom>
+          <a:solidFill>
+            <a:srgbClr val="262119"/>
+          </a:solidFill>
+          <a:ln>
+            <a:noFill/>
+          </a:ln>
+          <a:effectLst/>
+        </p:spPr>
+        <p:style>
+          <a:lnRef idx="1">
+            <a:schemeClr val="accent1"/>
+          </a:lnRef>
+          <a:fillRef idx="3">
+            <a:schemeClr val="accent1"/>
+          </a:fillRef>
+          <a:effectRef idx="2">
+            <a:schemeClr val="accent1"/>
+          </a:effectRef>
+          <a:fontRef idx="minor">
+            <a:schemeClr val="lt1"/>
+          </a:fontRef>
+        </p:style>
+        <p:txBody>
+          <a:bodyPr rtlCol="0" anchor="ctr"/>
+          <a:lstStyle/>
+          <a:p>
+            <a:pPr algn="ctr"/>
+          </a:p>
+        </p:txBody>
+      </p:sp>
+      <p:pic>
+        <p:nvPicPr>
+          <p:cNvPr id="8" name="Picture 7" descr="singhacks.png"/>
+          <p:cNvPicPr>
+            <a:picLocks noChangeAspect="1"/>
+          </p:cNvPicPr>
+          <p:nvPr/>
+        </p:nvPicPr>
+        <p:blipFill>
+          <a:blip r:embed="rId3"/>
+          <a:stretch>
+            <a:fillRect/>
+          </a:stretch>
+        </p:blipFill>
+        <p:spPr>
+          <a:xfrm>
+            <a:off x="9172631" y="5266944"/>
+            <a:ext cx="660981" cy="310896"/>
+          </a:xfrm>
+          <a:prstGeom prst="rect">
+            <a:avLst/>
+          </a:prstGeom>
+        </p:spPr>
+      </p:pic>
+      <p:sp>
+        <p:nvSpPr>
+          <p:cNvPr id="9" name="TextBox 8"/>
+          <p:cNvSpPr txBox="1"/>
+          <p:nvPr/>
+        </p:nvSpPr>
+        <p:spPr>
+          <a:xfrm>
+            <a:off x="7938191" y="5312664"/>
+            <a:ext cx="1051560" cy="274320"/>
+          </a:xfrm>
+          <a:prstGeom prst="rect">
+            <a:avLst/>
+          </a:prstGeom>
+          <a:noFill/>
+        </p:spPr>
+        <p:txBody>
+          <a:bodyPr wrap="square" lIns="0" rIns="0" tIns="0" bIns="0" anchor="t">
+            <a:spAutoFit/>
+          </a:bodyPr>
+          <a:lstStyle/>
+          <a:p>
+            <a:pPr algn="r">
+              <a:lnSpc>
+                <a:spcPct val="135000"/>
+              </a:lnSpc>
+              <a:spcAft>
+                <a:spcPts val="0"/>
+              </a:spcAft>
+            </a:pPr>
+            <a:r>
+              <a:rPr sz="900" b="0" i="0" spc="16">
+                <a:solidFill>
+                  <a:srgbClr val="7D766A"/>
+                </a:solidFill>
+                <a:latin typeface="Consolas"/>
+              </a:rPr>
+              <a:t>BUILT FOR</a:t>
             </a:r>
           </a:p>
         </p:txBody>

--- a/deck/KIRIM-pitch-deck.pptx
+++ b/deck/KIRIM-pitch-deck.pptx
@@ -19,6 +19,7 @@
     <p:sldId id="267" r:id="rId18"/>
     <p:sldId id="268" r:id="rId19"/>
     <p:sldId id="269" r:id="rId20"/>
+    <p:sldId id="270" r:id="rId21"/>
   </p:sldIdLst>
   <p:sldSz cx="12191695" cy="6858000" type="screen4x3"/>
   <p:notesSz cx="6858000" cy="9144000"/>
@@ -4331,7 +4332,7 @@
                 </a:solidFill>
                 <a:latin typeface="Segoe UI"/>
               </a:rPr>
-              <a:t>Escrow with crypto-conditions</a:t>
+              <a:t>The agent plans</a:t>
             </a:r>
           </a:p>
         </p:txBody>
@@ -4373,7 +4374,7 @@
                 </a:solidFill>
                 <a:latin typeface="Segoe UI"/>
               </a:rPr>
-              <a:t>EscrowCreate / EscrowFinish / EscrowCancel, hand-encoded PREIMAGE-SHA-256</a:t>
+              <a:t>Derives what must be established, proposes a plan, executes it</a:t>
             </a:r>
           </a:p>
         </p:txBody>
@@ -4545,7 +4546,7 @@
                 </a:solidFill>
                 <a:latin typeface="Segoe UI"/>
               </a:rPr>
-              <a:t>x402, both sides</a:t>
+              <a:t>Machine Payments Protocol</a:t>
             </a:r>
           </a:p>
         </p:txBody>
@@ -4587,7 +4588,7 @@
                 </a:solidFill>
                 <a:latin typeface="Segoe UI"/>
               </a:rPr>
-              <a:t>402 challenge, payment, on-ledger verification before a byte is served</a:t>
+              <a:t>xrpl-mpp-sdk — real 402 challenges, settled and verified on-ledger</a:t>
             </a:r>
           </a:p>
         </p:txBody>
@@ -4759,7 +4760,7 @@
                 </a:solidFill>
                 <a:latin typeface="Segoe UI"/>
               </a:rPr>
-              <a:t>Evidence examination</a:t>
+              <a:t>Escrow with crypto-conditions</a:t>
             </a:r>
           </a:p>
         </p:txBody>
@@ -4801,7 +4802,7 @@
                 </a:solidFill>
                 <a:latin typeface="Segoe UI"/>
               </a:rPr>
-              <a:t>Deterministic rules over photos, deliveries, permits, inspection</a:t>
+              <a:t>EscrowCreate / EscrowFinish / EscrowCancel, PREIMAGE-SHA-256</a:t>
             </a:r>
           </a:p>
         </p:txBody>
@@ -4973,7 +4974,7 @@
                 </a:solidFill>
                 <a:latin typeface="Segoe UI"/>
               </a:rPr>
-              <a:t>Spend controls</a:t>
+              <a:t>XRPL AI Starter Kit</a:t>
             </a:r>
           </a:p>
         </p:txBody>
@@ -5015,7 +5016,7 @@
                 </a:solidFill>
                 <a:latin typeface="Segoe UI"/>
               </a:rPr>
-              <a:t>Per-call, per-milestone, per-run ceilings enforced server-side</a:t>
+              <a:t>Both skills, Docs MCP, SourceTag 20260530, simulate before signing</a:t>
             </a:r>
           </a:p>
         </p:txBody>
@@ -5187,7 +5188,7 @@
                 </a:solidFill>
                 <a:latin typeface="Segoe UI"/>
               </a:rPr>
-              <a:t>XLS-70 track record</a:t>
+              <a:t>Client signs above the ceiling</a:t>
             </a:r>
           </a:p>
         </p:txBody>
@@ -5229,7 +5230,7 @@
                 </a:solidFill>
                 <a:latin typeface="Segoe UI"/>
               </a:rPr>
-              <a:t>Credential issued and accepted on the contractor's account</a:t>
+              <a:t>An XRPL Payment from her own wallet, verified before release</a:t>
             </a:r>
           </a:p>
         </p:txBody>
@@ -5401,7 +5402,7 @@
                 </a:solidFill>
                 <a:latin typeface="Segoe UI"/>
               </a:rPr>
-              <a:t>Live decision log</a:t>
+              <a:t>XLS-70 track record</a:t>
             </a:r>
           </a:p>
         </p:txBody>
@@ -5443,7 +5444,7 @@
                 </a:solidFill>
                 <a:latin typeface="Segoe UI"/>
               </a:rPr>
-              <a:t>Server-sent events, every decision with its reason and hash</a:t>
+              <a:t>A credential on the contractor's own account, idempotent per milestone</a:t>
             </a:r>
           </a:p>
         </p:txBody>
@@ -5549,7 +5550,7 @@
             <a:avLst/>
           </a:prstGeom>
           <a:solidFill>
-            <a:srgbClr val="B07A22"/>
+            <a:srgbClr val="2C5A4E"/>
           </a:solidFill>
           <a:ln>
             <a:noFill/>
@@ -5615,7 +5616,7 @@
                 </a:solidFill>
                 <a:latin typeface="Segoe UI"/>
               </a:rPr>
-              <a:t>RLUSD settlement</a:t>
+              <a:t>Kirim charges 0.8%</a:t>
             </a:r>
           </a:p>
         </p:txBody>
@@ -5657,7 +5658,7 @@
                 </a:solidFill>
                 <a:latin typeface="Segoe UI"/>
               </a:rPr>
-              <a:t>Issuer wired, trustlines placed — faucet funding outstanding</a:t>
+              <a:t>A second leg on the ledger at the moment of release</a:t>
             </a:r>
           </a:p>
         </p:txBody>
@@ -5695,11 +5696,11 @@
             <a:r>
               <a:rPr sz="1000" b="0" i="0" spc="10">
                 <a:solidFill>
-                  <a:srgbClr val="B07A22"/>
+                  <a:srgbClr val="2C5A4E"/>
                 </a:solidFill>
                 <a:latin typeface="Consolas"/>
               </a:rPr>
-              <a:t>partial</a:t>
+              <a:t>done</a:t>
             </a:r>
           </a:p>
         </p:txBody>
@@ -5763,7 +5764,7 @@
             <a:avLst/>
           </a:prstGeom>
           <a:solidFill>
-            <a:srgbClr val="8C8467"/>
+            <a:srgbClr val="2C5A4E"/>
           </a:solidFill>
           <a:ln>
             <a:noFill/>
@@ -5829,7 +5830,7 @@
                 </a:solidFill>
                 <a:latin typeface="Segoe UI"/>
               </a:rPr>
-              <a:t>Agent credit, DEX leg</a:t>
+              <a:t>Outage fallback</a:t>
             </a:r>
           </a:p>
         </p:txBody>
@@ -5871,7 +5872,7 @@
                 </a:solidFill>
                 <a:latin typeface="Segoe UI"/>
               </a:rPr>
-              <a:t>Draw-down instead of pre-funding; FX executed on the XRPL DEX</a:t>
+              <a:t>Providers publish availability; the plan routes around one that is down</a:t>
             </a:r>
           </a:p>
         </p:txBody>
@@ -5909,11 +5910,11 @@
             <a:r>
               <a:rPr sz="1000" b="0" i="0" spc="10">
                 <a:solidFill>
-                  <a:srgbClr val="8C8467"/>
+                  <a:srgbClr val="2C5A4E"/>
                 </a:solidFill>
                 <a:latin typeface="Consolas"/>
               </a:rPr>
-              <a:t>next</a:t>
+              <a:t>done</a:t>
             </a:r>
           </a:p>
         </p:txBody>
@@ -5970,6 +5971,434 @@
         </p:nvSpPr>
         <p:spPr>
           <a:xfrm>
+            <a:off x="777240" y="5843016"/>
+            <a:ext cx="54864" cy="274320"/>
+          </a:xfrm>
+          <a:prstGeom prst="rect">
+            <a:avLst/>
+          </a:prstGeom>
+          <a:solidFill>
+            <a:srgbClr val="B07A22"/>
+          </a:solidFill>
+          <a:ln>
+            <a:noFill/>
+          </a:ln>
+          <a:effectLst/>
+        </p:spPr>
+        <p:style>
+          <a:lnRef idx="1">
+            <a:schemeClr val="accent1"/>
+          </a:lnRef>
+          <a:fillRef idx="3">
+            <a:schemeClr val="accent1"/>
+          </a:fillRef>
+          <a:effectRef idx="2">
+            <a:schemeClr val="accent1"/>
+          </a:effectRef>
+          <a:fontRef idx="minor">
+            <a:schemeClr val="lt1"/>
+          </a:fontRef>
+        </p:style>
+        <p:txBody>
+          <a:bodyPr rtlCol="0" anchor="ctr" wrap="square"/>
+          <a:lstStyle/>
+          <a:p>
+            <a:pPr algn="ctr"/>
+          </a:p>
+        </p:txBody>
+      </p:sp>
+      <p:sp>
+        <p:nvSpPr>
+          <p:cNvPr id="47" name="TextBox 46"/>
+          <p:cNvSpPr txBox="1"/>
+          <p:nvPr/>
+        </p:nvSpPr>
+        <p:spPr>
+          <a:xfrm>
+            <a:off x="996696" y="5769864"/>
+            <a:ext cx="3291840" cy="365760"/>
+          </a:xfrm>
+          <a:prstGeom prst="rect">
+            <a:avLst/>
+          </a:prstGeom>
+          <a:noFill/>
+        </p:spPr>
+        <p:txBody>
+          <a:bodyPr wrap="square" lIns="0" rIns="0" tIns="0" bIns="0" anchor="t">
+            <a:spAutoFit/>
+          </a:bodyPr>
+          <a:lstStyle/>
+          <a:p>
+            <a:pPr algn="l">
+              <a:lnSpc>
+                <a:spcPct val="135000"/>
+              </a:lnSpc>
+              <a:spcAft>
+                <a:spcPts val="0"/>
+              </a:spcAft>
+            </a:pPr>
+            <a:r>
+              <a:rPr sz="1350" b="1" i="0">
+                <a:solidFill>
+                  <a:srgbClr val="17130D"/>
+                </a:solidFill>
+                <a:latin typeface="Segoe UI"/>
+              </a:rPr>
+              <a:t>RLUSD settlement</a:t>
+            </a:r>
+          </a:p>
+        </p:txBody>
+      </p:sp>
+      <p:sp>
+        <p:nvSpPr>
+          <p:cNvPr id="48" name="TextBox 47"/>
+          <p:cNvSpPr txBox="1"/>
+          <p:nvPr/>
+        </p:nvSpPr>
+        <p:spPr>
+          <a:xfrm>
+            <a:off x="4389120" y="5788152"/>
+            <a:ext cx="6035040" cy="365760"/>
+          </a:xfrm>
+          <a:prstGeom prst="rect">
+            <a:avLst/>
+          </a:prstGeom>
+          <a:noFill/>
+        </p:spPr>
+        <p:txBody>
+          <a:bodyPr wrap="square" lIns="0" rIns="0" tIns="0" bIns="0" anchor="t">
+            <a:spAutoFit/>
+          </a:bodyPr>
+          <a:lstStyle/>
+          <a:p>
+            <a:pPr algn="l">
+              <a:lnSpc>
+                <a:spcPct val="135000"/>
+              </a:lnSpc>
+              <a:spcAft>
+                <a:spcPts val="0"/>
+              </a:spcAft>
+            </a:pPr>
+            <a:r>
+              <a:rPr sz="1250" b="0" i="0">
+                <a:solidFill>
+                  <a:srgbClr val="514A3C"/>
+                </a:solidFill>
+                <a:latin typeface="Segoe UI"/>
+              </a:rPr>
+              <a:t>Issuer wired, trustlines placed — faucet claim outstanding</a:t>
+            </a:r>
+          </a:p>
+        </p:txBody>
+      </p:sp>
+      <p:sp>
+        <p:nvSpPr>
+          <p:cNvPr id="49" name="TextBox 48"/>
+          <p:cNvSpPr txBox="1"/>
+          <p:nvPr/>
+        </p:nvSpPr>
+        <p:spPr>
+          <a:xfrm>
+            <a:off x="10561320" y="5788152"/>
+            <a:ext cx="1188720" cy="320040"/>
+          </a:xfrm>
+          <a:prstGeom prst="rect">
+            <a:avLst/>
+          </a:prstGeom>
+          <a:noFill/>
+        </p:spPr>
+        <p:txBody>
+          <a:bodyPr wrap="square" lIns="0" rIns="0" tIns="0" bIns="0" anchor="t">
+            <a:spAutoFit/>
+          </a:bodyPr>
+          <a:lstStyle/>
+          <a:p>
+            <a:pPr algn="r">
+              <a:lnSpc>
+                <a:spcPct val="135000"/>
+              </a:lnSpc>
+              <a:spcAft>
+                <a:spcPts val="0"/>
+              </a:spcAft>
+            </a:pPr>
+            <a:r>
+              <a:rPr sz="1000" b="0" i="0" spc="10">
+                <a:solidFill>
+                  <a:srgbClr val="B07A22"/>
+                </a:solidFill>
+                <a:latin typeface="Consolas"/>
+              </a:rPr>
+              <a:t>partial</a:t>
+            </a:r>
+          </a:p>
+        </p:txBody>
+      </p:sp>
+      <p:sp>
+        <p:nvSpPr>
+          <p:cNvPr id="50" name="Rectangle 49"/>
+          <p:cNvSpPr/>
+          <p:nvPr/>
+        </p:nvSpPr>
+        <p:spPr>
+          <a:xfrm>
+            <a:off x="777240" y="6144768"/>
+            <a:ext cx="10637215" cy="4762"/>
+          </a:xfrm>
+          <a:prstGeom prst="rect">
+            <a:avLst/>
+          </a:prstGeom>
+          <a:solidFill>
+            <a:srgbClr val="E8E2D4"/>
+          </a:solidFill>
+          <a:ln>
+            <a:noFill/>
+          </a:ln>
+          <a:effectLst/>
+        </p:spPr>
+        <p:style>
+          <a:lnRef idx="1">
+            <a:schemeClr val="accent1"/>
+          </a:lnRef>
+          <a:fillRef idx="3">
+            <a:schemeClr val="accent1"/>
+          </a:fillRef>
+          <a:effectRef idx="2">
+            <a:schemeClr val="accent1"/>
+          </a:effectRef>
+          <a:fontRef idx="minor">
+            <a:schemeClr val="lt1"/>
+          </a:fontRef>
+        </p:style>
+        <p:txBody>
+          <a:bodyPr rtlCol="0" anchor="ctr"/>
+          <a:lstStyle/>
+          <a:p>
+            <a:pPr algn="ctr"/>
+          </a:p>
+        </p:txBody>
+      </p:sp>
+      <p:sp>
+        <p:nvSpPr>
+          <p:cNvPr id="51" name="Rectangle 50"/>
+          <p:cNvSpPr/>
+          <p:nvPr/>
+        </p:nvSpPr>
+        <p:spPr>
+          <a:xfrm>
+            <a:off x="777240" y="6318504"/>
+            <a:ext cx="54864" cy="274320"/>
+          </a:xfrm>
+          <a:prstGeom prst="rect">
+            <a:avLst/>
+          </a:prstGeom>
+          <a:solidFill>
+            <a:srgbClr val="8C8467"/>
+          </a:solidFill>
+          <a:ln>
+            <a:noFill/>
+          </a:ln>
+          <a:effectLst/>
+        </p:spPr>
+        <p:style>
+          <a:lnRef idx="1">
+            <a:schemeClr val="accent1"/>
+          </a:lnRef>
+          <a:fillRef idx="3">
+            <a:schemeClr val="accent1"/>
+          </a:fillRef>
+          <a:effectRef idx="2">
+            <a:schemeClr val="accent1"/>
+          </a:effectRef>
+          <a:fontRef idx="minor">
+            <a:schemeClr val="lt1"/>
+          </a:fontRef>
+        </p:style>
+        <p:txBody>
+          <a:bodyPr rtlCol="0" anchor="ctr" wrap="square"/>
+          <a:lstStyle/>
+          <a:p>
+            <a:pPr algn="ctr"/>
+          </a:p>
+        </p:txBody>
+      </p:sp>
+      <p:sp>
+        <p:nvSpPr>
+          <p:cNvPr id="52" name="TextBox 51"/>
+          <p:cNvSpPr txBox="1"/>
+          <p:nvPr/>
+        </p:nvSpPr>
+        <p:spPr>
+          <a:xfrm>
+            <a:off x="996696" y="6245352"/>
+            <a:ext cx="3291840" cy="365760"/>
+          </a:xfrm>
+          <a:prstGeom prst="rect">
+            <a:avLst/>
+          </a:prstGeom>
+          <a:noFill/>
+        </p:spPr>
+        <p:txBody>
+          <a:bodyPr wrap="square" lIns="0" rIns="0" tIns="0" bIns="0" anchor="t">
+            <a:spAutoFit/>
+          </a:bodyPr>
+          <a:lstStyle/>
+          <a:p>
+            <a:pPr algn="l">
+              <a:lnSpc>
+                <a:spcPct val="135000"/>
+              </a:lnSpc>
+              <a:spcAft>
+                <a:spcPts val="0"/>
+              </a:spcAft>
+            </a:pPr>
+            <a:r>
+              <a:rPr sz="1350" b="1" i="0">
+                <a:solidFill>
+                  <a:srgbClr val="17130D"/>
+                </a:solidFill>
+                <a:latin typeface="Segoe UI"/>
+              </a:rPr>
+              <a:t>Agent credit, DEX leg</a:t>
+            </a:r>
+          </a:p>
+        </p:txBody>
+      </p:sp>
+      <p:sp>
+        <p:nvSpPr>
+          <p:cNvPr id="53" name="TextBox 52"/>
+          <p:cNvSpPr txBox="1"/>
+          <p:nvPr/>
+        </p:nvSpPr>
+        <p:spPr>
+          <a:xfrm>
+            <a:off x="4389120" y="6263640"/>
+            <a:ext cx="6035040" cy="365760"/>
+          </a:xfrm>
+          <a:prstGeom prst="rect">
+            <a:avLst/>
+          </a:prstGeom>
+          <a:noFill/>
+        </p:spPr>
+        <p:txBody>
+          <a:bodyPr wrap="square" lIns="0" rIns="0" tIns="0" bIns="0" anchor="t">
+            <a:spAutoFit/>
+          </a:bodyPr>
+          <a:lstStyle/>
+          <a:p>
+            <a:pPr algn="l">
+              <a:lnSpc>
+                <a:spcPct val="135000"/>
+              </a:lnSpc>
+              <a:spcAft>
+                <a:spcPts val="0"/>
+              </a:spcAft>
+            </a:pPr>
+            <a:r>
+              <a:rPr sz="1250" b="0" i="0">
+                <a:solidFill>
+                  <a:srgbClr val="514A3C"/>
+                </a:solidFill>
+                <a:latin typeface="Segoe UI"/>
+              </a:rPr>
+              <a:t>Claw Credit written and gated; FX quoted but not executed</a:t>
+            </a:r>
+          </a:p>
+        </p:txBody>
+      </p:sp>
+      <p:sp>
+        <p:nvSpPr>
+          <p:cNvPr id="54" name="TextBox 53"/>
+          <p:cNvSpPr txBox="1"/>
+          <p:nvPr/>
+        </p:nvSpPr>
+        <p:spPr>
+          <a:xfrm>
+            <a:off x="10561320" y="6263640"/>
+            <a:ext cx="1188720" cy="320040"/>
+          </a:xfrm>
+          <a:prstGeom prst="rect">
+            <a:avLst/>
+          </a:prstGeom>
+          <a:noFill/>
+        </p:spPr>
+        <p:txBody>
+          <a:bodyPr wrap="square" lIns="0" rIns="0" tIns="0" bIns="0" anchor="t">
+            <a:spAutoFit/>
+          </a:bodyPr>
+          <a:lstStyle/>
+          <a:p>
+            <a:pPr algn="r">
+              <a:lnSpc>
+                <a:spcPct val="135000"/>
+              </a:lnSpc>
+              <a:spcAft>
+                <a:spcPts val="0"/>
+              </a:spcAft>
+            </a:pPr>
+            <a:r>
+              <a:rPr sz="1000" b="0" i="0" spc="10">
+                <a:solidFill>
+                  <a:srgbClr val="8C8467"/>
+                </a:solidFill>
+                <a:latin typeface="Consolas"/>
+              </a:rPr>
+              <a:t>next</a:t>
+            </a:r>
+          </a:p>
+        </p:txBody>
+      </p:sp>
+      <p:sp>
+        <p:nvSpPr>
+          <p:cNvPr id="55" name="Rectangle 54"/>
+          <p:cNvSpPr/>
+          <p:nvPr/>
+        </p:nvSpPr>
+        <p:spPr>
+          <a:xfrm>
+            <a:off x="777240" y="6620256"/>
+            <a:ext cx="10637215" cy="4762"/>
+          </a:xfrm>
+          <a:prstGeom prst="rect">
+            <a:avLst/>
+          </a:prstGeom>
+          <a:solidFill>
+            <a:srgbClr val="E8E2D4"/>
+          </a:solidFill>
+          <a:ln>
+            <a:noFill/>
+          </a:ln>
+          <a:effectLst/>
+        </p:spPr>
+        <p:style>
+          <a:lnRef idx="1">
+            <a:schemeClr val="accent1"/>
+          </a:lnRef>
+          <a:fillRef idx="3">
+            <a:schemeClr val="accent1"/>
+          </a:fillRef>
+          <a:effectRef idx="2">
+            <a:schemeClr val="accent1"/>
+          </a:effectRef>
+          <a:fontRef idx="minor">
+            <a:schemeClr val="lt1"/>
+          </a:fontRef>
+        </p:style>
+        <p:txBody>
+          <a:bodyPr rtlCol="0" anchor="ctr"/>
+          <a:lstStyle/>
+          <a:p>
+            <a:pPr algn="ctr"/>
+          </a:p>
+        </p:txBody>
+      </p:sp>
+      <p:sp>
+        <p:nvSpPr>
+          <p:cNvPr id="56" name="Rectangle 55"/>
+          <p:cNvSpPr/>
+          <p:nvPr/>
+        </p:nvSpPr>
+        <p:spPr>
+          <a:xfrm>
             <a:off x="777240" y="6199632"/>
             <a:ext cx="10637215" cy="4762"/>
           </a:xfrm>
@@ -6008,7 +6437,7 @@
       </p:sp>
       <p:sp>
         <p:nvSpPr>
-          <p:cNvPr id="47" name="TextBox 46"/>
+          <p:cNvPr id="57" name="TextBox 56"/>
           <p:cNvSpPr txBox="1"/>
           <p:nvPr/>
         </p:nvSpPr>
@@ -6050,7 +6479,7 @@
       </p:sp>
       <p:sp>
         <p:nvSpPr>
-          <p:cNvPr id="48" name="TextBox 47"/>
+          <p:cNvPr id="58" name="TextBox 57"/>
           <p:cNvSpPr txBox="1"/>
           <p:nvPr/>
         </p:nvSpPr>
@@ -6123,7 +6552,7 @@
             <a:avLst/>
           </a:prstGeom>
           <a:solidFill>
-            <a:srgbClr val="0F0D09"/>
+            <a:srgbClr val="F1ECE1"/>
           </a:solidFill>
           <a:ln>
             <a:noFill/>
@@ -6185,11 +6614,11 @@
             <a:r>
               <a:rPr sz="1050" b="0" i="0" spc="18">
                 <a:solidFill>
-                  <a:srgbClr val="7D766A"/>
+                  <a:srgbClr val="8C8467"/>
                 </a:solidFill>
                 <a:latin typeface="Consolas"/>
               </a:rPr>
-              <a:t>PROOF</a:t>
+              <a:t>ABOVE THE CEILING</a:t>
             </a:r>
           </a:p>
         </p:txBody>
@@ -6225,13 +6654,13 @@
               </a:spcAft>
             </a:pPr>
             <a:r>
-              <a:rPr sz="3600" b="0" i="0">
-                <a:solidFill>
-                  <a:srgbClr val="D9D3C5"/>
+              <a:rPr sz="3200" b="0" i="0">
+                <a:solidFill>
+                  <a:srgbClr val="17130D"/>
                 </a:solidFill>
                 <a:latin typeface="Georgia"/>
               </a:rPr>
-              <a:t>Every payment on this slide is real.</a:t>
+              <a:t>“The client approved” is a signature, not a checkbox.</a:t>
             </a:r>
           </a:p>
         </p:txBody>
@@ -6244,8 +6673,8 @@
         </p:nvSpPr>
         <p:spPr>
           <a:xfrm>
-            <a:off x="777240" y="1783080"/>
-            <a:ext cx="10607040" cy="457200"/>
+            <a:off x="777240" y="1874519"/>
+            <a:ext cx="5669280" cy="2011680"/>
           </a:xfrm>
           <a:prstGeom prst="rect">
             <a:avLst/>
@@ -6260,20 +6689,39 @@
           <a:p>
             <a:pPr algn="l">
               <a:lnSpc>
-                <a:spcPct val="135000"/>
-              </a:lnSpc>
-              <a:spcAft>
-                <a:spcPts val="0"/>
-              </a:spcAft>
-            </a:pPr>
-            <a:r>
-              <a:rPr sz="1400" b="0" i="0">
-                <a:solidFill>
-                  <a:srgbClr val="9B9483"/>
+                <a:spcPct val="155000"/>
+              </a:lnSpc>
+              <a:spcAft>
+                <a:spcPts val="1400"/>
+              </a:spcAft>
+            </a:pPr>
+            <a:r>
+              <a:rPr sz="1550" b="0" i="0">
+                <a:solidFill>
+                  <a:srgbClr val="514A3C"/>
                 </a:solidFill>
                 <a:latin typeface="Segoe UI"/>
               </a:rPr>
-              <a:t>XRP Ledger Testnet. Supply is simulated — the contractor, the photographs, the inspector. The ledger is not.</a:t>
+              <a:t>Below Sarah's own ceiling the agent releases on its own. Above it, the evidence is examined and the money waits for her — and approval means an XRPL payment from her own wallet carrying a memo naming the milestone.</a:t>
+            </a:r>
+          </a:p>
+          <a:p>
+            <a:pPr>
+              <a:lnSpc>
+                <a:spcPct val="155000"/>
+              </a:lnSpc>
+              <a:spcAft>
+                <a:spcPts val="0"/>
+              </a:spcAft>
+            </a:pPr>
+            <a:r>
+              <a:rPr sz="1550" b="0" i="0">
+                <a:solidFill>
+                  <a:srgbClr val="514A3C"/>
+                </a:solidFill>
+                <a:latin typeface="Segoe UI"/>
+              </a:rPr>
+              <a:t>Crossmark and GemWallet are wired into the console. Any other wallet produces the same authorisation, so the demo does not depend on an extension being installed.</a:t>
             </a:r>
           </a:p>
         </p:txBody>
@@ -6286,862 +6734,8 @@
         </p:nvSpPr>
         <p:spPr>
           <a:xfrm>
-            <a:off x="777240" y="2386584"/>
-            <a:ext cx="10637215" cy="4762"/>
-          </a:xfrm>
-          <a:prstGeom prst="rect">
-            <a:avLst/>
-          </a:prstGeom>
-          <a:solidFill>
-            <a:srgbClr val="262119"/>
-          </a:solidFill>
-          <a:ln>
-            <a:noFill/>
-          </a:ln>
-          <a:effectLst/>
-        </p:spPr>
-        <p:style>
-          <a:lnRef idx="1">
-            <a:schemeClr val="accent1"/>
-          </a:lnRef>
-          <a:fillRef idx="3">
-            <a:schemeClr val="accent1"/>
-          </a:fillRef>
-          <a:effectRef idx="2">
-            <a:schemeClr val="accent1"/>
-          </a:effectRef>
-          <a:fontRef idx="minor">
-            <a:schemeClr val="lt1"/>
-          </a:fontRef>
-        </p:style>
-        <p:txBody>
-          <a:bodyPr rtlCol="0" anchor="ctr"/>
-          <a:lstStyle/>
-          <a:p>
-            <a:pPr algn="ctr"/>
-          </a:p>
-        </p:txBody>
-      </p:sp>
-      <p:sp>
-        <p:nvSpPr>
-          <p:cNvPr id="7" name="TextBox 6"/>
-          <p:cNvSpPr txBox="1"/>
-          <p:nvPr/>
-        </p:nvSpPr>
-        <p:spPr>
-          <a:xfrm>
-            <a:off x="777240" y="2514600"/>
-            <a:ext cx="3200400" cy="292608"/>
-          </a:xfrm>
-          <a:prstGeom prst="rect">
-            <a:avLst/>
-          </a:prstGeom>
-          <a:noFill/>
-        </p:spPr>
-        <p:txBody>
-          <a:bodyPr wrap="square" lIns="0" rIns="0" tIns="0" bIns="0" anchor="t">
-            <a:spAutoFit/>
-          </a:bodyPr>
-          <a:lstStyle/>
-          <a:p>
-            <a:pPr algn="l">
-              <a:lnSpc>
-                <a:spcPct val="135000"/>
-              </a:lnSpc>
-              <a:spcAft>
-                <a:spcPts val="0"/>
-              </a:spcAft>
-            </a:pPr>
-            <a:r>
-              <a:rPr sz="1250" b="0" i="0">
-                <a:solidFill>
-                  <a:srgbClr val="D9D3C5"/>
-                </a:solidFill>
-                <a:latin typeface="Segoe UI"/>
-              </a:rPr>
-              <a:t>M1 escrow funded</a:t>
-            </a:r>
-          </a:p>
-        </p:txBody>
-      </p:sp>
-      <p:sp>
-        <p:nvSpPr>
-          <p:cNvPr id="8" name="TextBox 7"/>
-          <p:cNvSpPr txBox="1"/>
-          <p:nvPr/>
-        </p:nvSpPr>
-        <p:spPr>
-          <a:xfrm>
-            <a:off x="4069080" y="2532888"/>
-            <a:ext cx="7315200" cy="292608"/>
-          </a:xfrm>
-          <a:prstGeom prst="rect">
-            <a:avLst/>
-          </a:prstGeom>
-          <a:noFill/>
-        </p:spPr>
-        <p:txBody>
-          <a:bodyPr wrap="square" lIns="0" rIns="0" tIns="0" bIns="0" anchor="t">
-            <a:spAutoFit/>
-          </a:bodyPr>
-          <a:lstStyle/>
-          <a:p>
-            <a:pPr algn="l">
-              <a:lnSpc>
-                <a:spcPct val="135000"/>
-              </a:lnSpc>
-              <a:spcAft>
-                <a:spcPts val="0"/>
-              </a:spcAft>
-            </a:pPr>
-            <a:r>
-              <a:rPr sz="1050" b="0" i="0">
-                <a:solidFill>
-                  <a:srgbClr val="5E9B79"/>
-                </a:solidFill>
-                <a:latin typeface="Consolas"/>
-              </a:rPr>
-              <a:t>3954D4FD802CB6320D37DD8F7659554BEBC861B32517D50FE01675C6FD9F249D</a:t>
-            </a:r>
-          </a:p>
-        </p:txBody>
-      </p:sp>
-      <p:sp>
-        <p:nvSpPr>
-          <p:cNvPr id="9" name="Rectangle 8"/>
-          <p:cNvSpPr/>
-          <p:nvPr/>
-        </p:nvSpPr>
-        <p:spPr>
-          <a:xfrm>
-            <a:off x="777240" y="2825496"/>
-            <a:ext cx="10637215" cy="4762"/>
-          </a:xfrm>
-          <a:prstGeom prst="rect">
-            <a:avLst/>
-          </a:prstGeom>
-          <a:solidFill>
-            <a:srgbClr val="262119"/>
-          </a:solidFill>
-          <a:ln>
-            <a:noFill/>
-          </a:ln>
-          <a:effectLst/>
-        </p:spPr>
-        <p:style>
-          <a:lnRef idx="1">
-            <a:schemeClr val="accent1"/>
-          </a:lnRef>
-          <a:fillRef idx="3">
-            <a:schemeClr val="accent1"/>
-          </a:fillRef>
-          <a:effectRef idx="2">
-            <a:schemeClr val="accent1"/>
-          </a:effectRef>
-          <a:fontRef idx="minor">
-            <a:schemeClr val="lt1"/>
-          </a:fontRef>
-        </p:style>
-        <p:txBody>
-          <a:bodyPr rtlCol="0" anchor="ctr"/>
-          <a:lstStyle/>
-          <a:p>
-            <a:pPr algn="ctr"/>
-          </a:p>
-        </p:txBody>
-      </p:sp>
-      <p:sp>
-        <p:nvSpPr>
-          <p:cNvPr id="10" name="TextBox 9"/>
-          <p:cNvSpPr txBox="1"/>
-          <p:nvPr/>
-        </p:nvSpPr>
-        <p:spPr>
-          <a:xfrm>
-            <a:off x="777240" y="2935224"/>
-            <a:ext cx="3200400" cy="292608"/>
-          </a:xfrm>
-          <a:prstGeom prst="rect">
-            <a:avLst/>
-          </a:prstGeom>
-          <a:noFill/>
-        </p:spPr>
-        <p:txBody>
-          <a:bodyPr wrap="square" lIns="0" rIns="0" tIns="0" bIns="0" anchor="t">
-            <a:spAutoFit/>
-          </a:bodyPr>
-          <a:lstStyle/>
-          <a:p>
-            <a:pPr algn="l">
-              <a:lnSpc>
-                <a:spcPct val="135000"/>
-              </a:lnSpc>
-              <a:spcAft>
-                <a:spcPts val="0"/>
-              </a:spcAft>
-            </a:pPr>
-            <a:r>
-              <a:rPr sz="1250" b="0" i="0">
-                <a:solidFill>
-                  <a:srgbClr val="D9D3C5"/>
-                </a:solidFill>
-                <a:latin typeface="Segoe UI"/>
-              </a:rPr>
-              <a:t>x402 — evidence check paid</a:t>
-            </a:r>
-          </a:p>
-        </p:txBody>
-      </p:sp>
-      <p:sp>
-        <p:nvSpPr>
-          <p:cNvPr id="11" name="TextBox 10"/>
-          <p:cNvSpPr txBox="1"/>
-          <p:nvPr/>
-        </p:nvSpPr>
-        <p:spPr>
-          <a:xfrm>
-            <a:off x="4069080" y="2953512"/>
-            <a:ext cx="7315200" cy="292608"/>
-          </a:xfrm>
-          <a:prstGeom prst="rect">
-            <a:avLst/>
-          </a:prstGeom>
-          <a:noFill/>
-        </p:spPr>
-        <p:txBody>
-          <a:bodyPr wrap="square" lIns="0" rIns="0" tIns="0" bIns="0" anchor="t">
-            <a:spAutoFit/>
-          </a:bodyPr>
-          <a:lstStyle/>
-          <a:p>
-            <a:pPr algn="l">
-              <a:lnSpc>
-                <a:spcPct val="135000"/>
-              </a:lnSpc>
-              <a:spcAft>
-                <a:spcPts val="0"/>
-              </a:spcAft>
-            </a:pPr>
-            <a:r>
-              <a:rPr sz="1050" b="0" i="0">
-                <a:solidFill>
-                  <a:srgbClr val="5E9B79"/>
-                </a:solidFill>
-                <a:latin typeface="Consolas"/>
-              </a:rPr>
-              <a:t>EDA2C04409AA41618376126C460A0DE0B161934C6424176A0497082979ECC16B</a:t>
-            </a:r>
-          </a:p>
-        </p:txBody>
-      </p:sp>
-      <p:sp>
-        <p:nvSpPr>
-          <p:cNvPr id="12" name="Rectangle 11"/>
-          <p:cNvSpPr/>
-          <p:nvPr/>
-        </p:nvSpPr>
-        <p:spPr>
-          <a:xfrm>
-            <a:off x="777240" y="3246120"/>
-            <a:ext cx="10637215" cy="4762"/>
-          </a:xfrm>
-          <a:prstGeom prst="rect">
-            <a:avLst/>
-          </a:prstGeom>
-          <a:solidFill>
-            <a:srgbClr val="262119"/>
-          </a:solidFill>
-          <a:ln>
-            <a:noFill/>
-          </a:ln>
-          <a:effectLst/>
-        </p:spPr>
-        <p:style>
-          <a:lnRef idx="1">
-            <a:schemeClr val="accent1"/>
-          </a:lnRef>
-          <a:fillRef idx="3">
-            <a:schemeClr val="accent1"/>
-          </a:fillRef>
-          <a:effectRef idx="2">
-            <a:schemeClr val="accent1"/>
-          </a:effectRef>
-          <a:fontRef idx="minor">
-            <a:schemeClr val="lt1"/>
-          </a:fontRef>
-        </p:style>
-        <p:txBody>
-          <a:bodyPr rtlCol="0" anchor="ctr"/>
-          <a:lstStyle/>
-          <a:p>
-            <a:pPr algn="ctr"/>
-          </a:p>
-        </p:txBody>
-      </p:sp>
-      <p:sp>
-        <p:nvSpPr>
-          <p:cNvPr id="13" name="TextBox 12"/>
-          <p:cNvSpPr txBox="1"/>
-          <p:nvPr/>
-        </p:nvSpPr>
-        <p:spPr>
-          <a:xfrm>
-            <a:off x="777240" y="3355848"/>
-            <a:ext cx="3200400" cy="292608"/>
-          </a:xfrm>
-          <a:prstGeom prst="rect">
-            <a:avLst/>
-          </a:prstGeom>
-          <a:noFill/>
-        </p:spPr>
-        <p:txBody>
-          <a:bodyPr wrap="square" lIns="0" rIns="0" tIns="0" bIns="0" anchor="t">
-            <a:spAutoFit/>
-          </a:bodyPr>
-          <a:lstStyle/>
-          <a:p>
-            <a:pPr algn="l">
-              <a:lnSpc>
-                <a:spcPct val="135000"/>
-              </a:lnSpc>
-              <a:spcAft>
-                <a:spcPts val="0"/>
-              </a:spcAft>
-            </a:pPr>
-            <a:r>
-              <a:rPr sz="1250" b="0" i="0">
-                <a:solidFill>
-                  <a:srgbClr val="D9D3C5"/>
-                </a:solidFill>
-                <a:latin typeface="Segoe UI"/>
-              </a:rPr>
-              <a:t>M1 released to contractor</a:t>
-            </a:r>
-          </a:p>
-        </p:txBody>
-      </p:sp>
-      <p:sp>
-        <p:nvSpPr>
-          <p:cNvPr id="14" name="TextBox 13"/>
-          <p:cNvSpPr txBox="1"/>
-          <p:nvPr/>
-        </p:nvSpPr>
-        <p:spPr>
-          <a:xfrm>
-            <a:off x="4069080" y="3374136"/>
-            <a:ext cx="7315200" cy="292608"/>
-          </a:xfrm>
-          <a:prstGeom prst="rect">
-            <a:avLst/>
-          </a:prstGeom>
-          <a:noFill/>
-        </p:spPr>
-        <p:txBody>
-          <a:bodyPr wrap="square" lIns="0" rIns="0" tIns="0" bIns="0" anchor="t">
-            <a:spAutoFit/>
-          </a:bodyPr>
-          <a:lstStyle/>
-          <a:p>
-            <a:pPr algn="l">
-              <a:lnSpc>
-                <a:spcPct val="135000"/>
-              </a:lnSpc>
-              <a:spcAft>
-                <a:spcPts val="0"/>
-              </a:spcAft>
-            </a:pPr>
-            <a:r>
-              <a:rPr sz="1050" b="0" i="0">
-                <a:solidFill>
-                  <a:srgbClr val="5E9B79"/>
-                </a:solidFill>
-                <a:latin typeface="Consolas"/>
-              </a:rPr>
-              <a:t>C7C034D6C740452B353246A67FDA069C29EE9173C482198E266A72E750CC0288</a:t>
-            </a:r>
-          </a:p>
-        </p:txBody>
-      </p:sp>
-      <p:sp>
-        <p:nvSpPr>
-          <p:cNvPr id="15" name="Rectangle 14"/>
-          <p:cNvSpPr/>
-          <p:nvPr/>
-        </p:nvSpPr>
-        <p:spPr>
-          <a:xfrm>
-            <a:off x="777240" y="3666744"/>
-            <a:ext cx="10637215" cy="4762"/>
-          </a:xfrm>
-          <a:prstGeom prst="rect">
-            <a:avLst/>
-          </a:prstGeom>
-          <a:solidFill>
-            <a:srgbClr val="262119"/>
-          </a:solidFill>
-          <a:ln>
-            <a:noFill/>
-          </a:ln>
-          <a:effectLst/>
-        </p:spPr>
-        <p:style>
-          <a:lnRef idx="1">
-            <a:schemeClr val="accent1"/>
-          </a:lnRef>
-          <a:fillRef idx="3">
-            <a:schemeClr val="accent1"/>
-          </a:fillRef>
-          <a:effectRef idx="2">
-            <a:schemeClr val="accent1"/>
-          </a:effectRef>
-          <a:fontRef idx="minor">
-            <a:schemeClr val="lt1"/>
-          </a:fontRef>
-        </p:style>
-        <p:txBody>
-          <a:bodyPr rtlCol="0" anchor="ctr"/>
-          <a:lstStyle/>
-          <a:p>
-            <a:pPr algn="ctr"/>
-          </a:p>
-        </p:txBody>
-      </p:sp>
-      <p:sp>
-        <p:nvSpPr>
-          <p:cNvPr id="16" name="TextBox 15"/>
-          <p:cNvSpPr txBox="1"/>
-          <p:nvPr/>
-        </p:nvSpPr>
-        <p:spPr>
-          <a:xfrm>
-            <a:off x="777240" y="3776472"/>
-            <a:ext cx="3200400" cy="292608"/>
-          </a:xfrm>
-          <a:prstGeom prst="rect">
-            <a:avLst/>
-          </a:prstGeom>
-          <a:noFill/>
-        </p:spPr>
-        <p:txBody>
-          <a:bodyPr wrap="square" lIns="0" rIns="0" tIns="0" bIns="0" anchor="t">
-            <a:spAutoFit/>
-          </a:bodyPr>
-          <a:lstStyle/>
-          <a:p>
-            <a:pPr algn="l">
-              <a:lnSpc>
-                <a:spcPct val="135000"/>
-              </a:lnSpc>
-              <a:spcAft>
-                <a:spcPts val="0"/>
-              </a:spcAft>
-            </a:pPr>
-            <a:r>
-              <a:rPr sz="1250" b="0" i="0">
-                <a:solidFill>
-                  <a:srgbClr val="D9D3C5"/>
-                </a:solidFill>
-                <a:latin typeface="Segoe UI"/>
-              </a:rPr>
-              <a:t>M2 escrow funded (later flagged)</a:t>
-            </a:r>
-          </a:p>
-        </p:txBody>
-      </p:sp>
-      <p:sp>
-        <p:nvSpPr>
-          <p:cNvPr id="17" name="TextBox 16"/>
-          <p:cNvSpPr txBox="1"/>
-          <p:nvPr/>
-        </p:nvSpPr>
-        <p:spPr>
-          <a:xfrm>
-            <a:off x="4069080" y="3794760"/>
-            <a:ext cx="7315200" cy="292608"/>
-          </a:xfrm>
-          <a:prstGeom prst="rect">
-            <a:avLst/>
-          </a:prstGeom>
-          <a:noFill/>
-        </p:spPr>
-        <p:txBody>
-          <a:bodyPr wrap="square" lIns="0" rIns="0" tIns="0" bIns="0" anchor="t">
-            <a:spAutoFit/>
-          </a:bodyPr>
-          <a:lstStyle/>
-          <a:p>
-            <a:pPr algn="l">
-              <a:lnSpc>
-                <a:spcPct val="135000"/>
-              </a:lnSpc>
-              <a:spcAft>
-                <a:spcPts val="0"/>
-              </a:spcAft>
-            </a:pPr>
-            <a:r>
-              <a:rPr sz="1050" b="0" i="0">
-                <a:solidFill>
-                  <a:srgbClr val="5E9B79"/>
-                </a:solidFill>
-                <a:latin typeface="Consolas"/>
-              </a:rPr>
-              <a:t>7A0E4EC247749F4F37C5304F8DB9FC6FE5F2EA5FF8883C79520782CDF8CECC39</a:t>
-            </a:r>
-          </a:p>
-        </p:txBody>
-      </p:sp>
-      <p:sp>
-        <p:nvSpPr>
-          <p:cNvPr id="18" name="Rectangle 17"/>
-          <p:cNvSpPr/>
-          <p:nvPr/>
-        </p:nvSpPr>
-        <p:spPr>
-          <a:xfrm>
-            <a:off x="777240" y="4087368"/>
-            <a:ext cx="10637215" cy="4762"/>
-          </a:xfrm>
-          <a:prstGeom prst="rect">
-            <a:avLst/>
-          </a:prstGeom>
-          <a:solidFill>
-            <a:srgbClr val="262119"/>
-          </a:solidFill>
-          <a:ln>
-            <a:noFill/>
-          </a:ln>
-          <a:effectLst/>
-        </p:spPr>
-        <p:style>
-          <a:lnRef idx="1">
-            <a:schemeClr val="accent1"/>
-          </a:lnRef>
-          <a:fillRef idx="3">
-            <a:schemeClr val="accent1"/>
-          </a:fillRef>
-          <a:effectRef idx="2">
-            <a:schemeClr val="accent1"/>
-          </a:effectRef>
-          <a:fontRef idx="minor">
-            <a:schemeClr val="lt1"/>
-          </a:fontRef>
-        </p:style>
-        <p:txBody>
-          <a:bodyPr rtlCol="0" anchor="ctr"/>
-          <a:lstStyle/>
-          <a:p>
-            <a:pPr algn="ctr"/>
-          </a:p>
-        </p:txBody>
-      </p:sp>
-      <p:sp>
-        <p:nvSpPr>
-          <p:cNvPr id="19" name="TextBox 18"/>
-          <p:cNvSpPr txBox="1"/>
-          <p:nvPr/>
-        </p:nvSpPr>
-        <p:spPr>
-          <a:xfrm>
-            <a:off x="777240" y="4197096"/>
-            <a:ext cx="3200400" cy="292608"/>
-          </a:xfrm>
-          <a:prstGeom prst="rect">
-            <a:avLst/>
-          </a:prstGeom>
-          <a:noFill/>
-        </p:spPr>
-        <p:txBody>
-          <a:bodyPr wrap="square" lIns="0" rIns="0" tIns="0" bIns="0" anchor="t">
-            <a:spAutoFit/>
-          </a:bodyPr>
-          <a:lstStyle/>
-          <a:p>
-            <a:pPr algn="l">
-              <a:lnSpc>
-                <a:spcPct val="135000"/>
-              </a:lnSpc>
-              <a:spcAft>
-                <a:spcPts val="0"/>
-              </a:spcAft>
-            </a:pPr>
-            <a:r>
-              <a:rPr sz="1250" b="0" i="0">
-                <a:solidFill>
-                  <a:srgbClr val="D9D3C5"/>
-                </a:solidFill>
-                <a:latin typeface="Segoe UI"/>
-              </a:rPr>
-              <a:t>M6 returned to client on timeout</a:t>
-            </a:r>
-          </a:p>
-        </p:txBody>
-      </p:sp>
-      <p:sp>
-        <p:nvSpPr>
-          <p:cNvPr id="20" name="TextBox 19"/>
-          <p:cNvSpPr txBox="1"/>
-          <p:nvPr/>
-        </p:nvSpPr>
-        <p:spPr>
-          <a:xfrm>
-            <a:off x="4069080" y="4215384"/>
-            <a:ext cx="7315200" cy="292608"/>
-          </a:xfrm>
-          <a:prstGeom prst="rect">
-            <a:avLst/>
-          </a:prstGeom>
-          <a:noFill/>
-        </p:spPr>
-        <p:txBody>
-          <a:bodyPr wrap="square" lIns="0" rIns="0" tIns="0" bIns="0" anchor="t">
-            <a:spAutoFit/>
-          </a:bodyPr>
-          <a:lstStyle/>
-          <a:p>
-            <a:pPr algn="l">
-              <a:lnSpc>
-                <a:spcPct val="135000"/>
-              </a:lnSpc>
-              <a:spcAft>
-                <a:spcPts val="0"/>
-              </a:spcAft>
-            </a:pPr>
-            <a:r>
-              <a:rPr sz="1050" b="0" i="0">
-                <a:solidFill>
-                  <a:srgbClr val="5E9B79"/>
-                </a:solidFill>
-                <a:latin typeface="Consolas"/>
-              </a:rPr>
-              <a:t>2CE81FFA49F7C09034274043499C32BA44AFB06ADD676CB3567077D6C1A6BE51</a:t>
-            </a:r>
-          </a:p>
-        </p:txBody>
-      </p:sp>
-      <p:sp>
-        <p:nvSpPr>
-          <p:cNvPr id="21" name="Rectangle 20"/>
-          <p:cNvSpPr/>
-          <p:nvPr/>
-        </p:nvSpPr>
-        <p:spPr>
-          <a:xfrm>
-            <a:off x="777240" y="4507992"/>
-            <a:ext cx="10637215" cy="4762"/>
-          </a:xfrm>
-          <a:prstGeom prst="rect">
-            <a:avLst/>
-          </a:prstGeom>
-          <a:solidFill>
-            <a:srgbClr val="262119"/>
-          </a:solidFill>
-          <a:ln>
-            <a:noFill/>
-          </a:ln>
-          <a:effectLst/>
-        </p:spPr>
-        <p:style>
-          <a:lnRef idx="1">
-            <a:schemeClr val="accent1"/>
-          </a:lnRef>
-          <a:fillRef idx="3">
-            <a:schemeClr val="accent1"/>
-          </a:fillRef>
-          <a:effectRef idx="2">
-            <a:schemeClr val="accent1"/>
-          </a:effectRef>
-          <a:fontRef idx="minor">
-            <a:schemeClr val="lt1"/>
-          </a:fontRef>
-        </p:style>
-        <p:txBody>
-          <a:bodyPr rtlCol="0" anchor="ctr"/>
-          <a:lstStyle/>
-          <a:p>
-            <a:pPr algn="ctr"/>
-          </a:p>
-        </p:txBody>
-      </p:sp>
-      <p:sp>
-        <p:nvSpPr>
-          <p:cNvPr id="22" name="TextBox 21"/>
-          <p:cNvSpPr txBox="1"/>
-          <p:nvPr/>
-        </p:nvSpPr>
-        <p:spPr>
-          <a:xfrm>
-            <a:off x="777240" y="4617720"/>
-            <a:ext cx="3200400" cy="292608"/>
-          </a:xfrm>
-          <a:prstGeom prst="rect">
-            <a:avLst/>
-          </a:prstGeom>
-          <a:noFill/>
-        </p:spPr>
-        <p:txBody>
-          <a:bodyPr wrap="square" lIns="0" rIns="0" tIns="0" bIns="0" anchor="t">
-            <a:spAutoFit/>
-          </a:bodyPr>
-          <a:lstStyle/>
-          <a:p>
-            <a:pPr algn="l">
-              <a:lnSpc>
-                <a:spcPct val="135000"/>
-              </a:lnSpc>
-              <a:spcAft>
-                <a:spcPts val="0"/>
-              </a:spcAft>
-            </a:pPr>
-            <a:r>
-              <a:rPr sz="1250" b="0" i="0">
-                <a:solidFill>
-                  <a:srgbClr val="D9D3C5"/>
-                </a:solidFill>
-                <a:latin typeface="Segoe UI"/>
-              </a:rPr>
-              <a:t>XLS-70 credential issued</a:t>
-            </a:r>
-          </a:p>
-        </p:txBody>
-      </p:sp>
-      <p:sp>
-        <p:nvSpPr>
-          <p:cNvPr id="23" name="TextBox 22"/>
-          <p:cNvSpPr txBox="1"/>
-          <p:nvPr/>
-        </p:nvSpPr>
-        <p:spPr>
-          <a:xfrm>
-            <a:off x="4069080" y="4636008"/>
-            <a:ext cx="7315200" cy="292608"/>
-          </a:xfrm>
-          <a:prstGeom prst="rect">
-            <a:avLst/>
-          </a:prstGeom>
-          <a:noFill/>
-        </p:spPr>
-        <p:txBody>
-          <a:bodyPr wrap="square" lIns="0" rIns="0" tIns="0" bIns="0" anchor="t">
-            <a:spAutoFit/>
-          </a:bodyPr>
-          <a:lstStyle/>
-          <a:p>
-            <a:pPr algn="l">
-              <a:lnSpc>
-                <a:spcPct val="135000"/>
-              </a:lnSpc>
-              <a:spcAft>
-                <a:spcPts val="0"/>
-              </a:spcAft>
-            </a:pPr>
-            <a:r>
-              <a:rPr sz="1050" b="0" i="0">
-                <a:solidFill>
-                  <a:srgbClr val="5E9B79"/>
-                </a:solidFill>
-                <a:latin typeface="Consolas"/>
-              </a:rPr>
-              <a:t>015A393AAE9EA17806D81D1BBEE3D3F698E952942918F566A9148253A3877641</a:t>
-            </a:r>
-          </a:p>
-        </p:txBody>
-      </p:sp>
-      <p:sp>
-        <p:nvSpPr>
-          <p:cNvPr id="24" name="Rectangle 23"/>
-          <p:cNvSpPr/>
-          <p:nvPr/>
-        </p:nvSpPr>
-        <p:spPr>
-          <a:xfrm>
-            <a:off x="777240" y="4928616"/>
-            <a:ext cx="10637215" cy="4762"/>
-          </a:xfrm>
-          <a:prstGeom prst="rect">
-            <a:avLst/>
-          </a:prstGeom>
-          <a:solidFill>
-            <a:srgbClr val="262119"/>
-          </a:solidFill>
-          <a:ln>
-            <a:noFill/>
-          </a:ln>
-          <a:effectLst/>
-        </p:spPr>
-        <p:style>
-          <a:lnRef idx="1">
-            <a:schemeClr val="accent1"/>
-          </a:lnRef>
-          <a:fillRef idx="3">
-            <a:schemeClr val="accent1"/>
-          </a:fillRef>
-          <a:effectRef idx="2">
-            <a:schemeClr val="accent1"/>
-          </a:effectRef>
-          <a:fontRef idx="minor">
-            <a:schemeClr val="lt1"/>
-          </a:fontRef>
-        </p:style>
-        <p:txBody>
-          <a:bodyPr rtlCol="0" anchor="ctr"/>
-          <a:lstStyle/>
-          <a:p>
-            <a:pPr algn="ctr"/>
-          </a:p>
-        </p:txBody>
-      </p:sp>
-      <p:sp>
-        <p:nvSpPr>
-          <p:cNvPr id="25" name="TextBox 24"/>
-          <p:cNvSpPr txBox="1"/>
-          <p:nvPr/>
-        </p:nvSpPr>
-        <p:spPr>
-          <a:xfrm>
-            <a:off x="777240" y="5440680"/>
-            <a:ext cx="10607040" cy="365760"/>
-          </a:xfrm>
-          <a:prstGeom prst="rect">
-            <a:avLst/>
-          </a:prstGeom>
-          <a:noFill/>
-        </p:spPr>
-        <p:txBody>
-          <a:bodyPr wrap="square" lIns="0" rIns="0" tIns="0" bIns="0" anchor="t">
-            <a:spAutoFit/>
-          </a:bodyPr>
-          <a:lstStyle/>
-          <a:p>
-            <a:pPr algn="l">
-              <a:lnSpc>
-                <a:spcPct val="135000"/>
-              </a:lnSpc>
-              <a:spcAft>
-                <a:spcPts val="0"/>
-              </a:spcAft>
-            </a:pPr>
-            <a:r>
-              <a:rPr sz="1100" b="0" i="0">
-                <a:solidFill>
-                  <a:srgbClr val="7D766A"/>
-                </a:solidFill>
-                <a:latin typeface="Consolas"/>
-              </a:rPr>
-              <a:t>testnet.xrpl.org/transactions/&lt;hash&gt;</a:t>
-            </a:r>
-          </a:p>
-        </p:txBody>
-      </p:sp>
-      <p:sp>
-        <p:nvSpPr>
-          <p:cNvPr id="26" name="Rectangle 25"/>
-          <p:cNvSpPr/>
-          <p:nvPr/>
-        </p:nvSpPr>
-        <p:spPr>
-          <a:xfrm>
-            <a:off x="777240" y="6199632"/>
-            <a:ext cx="10637215" cy="4762"/>
+            <a:off x="7086600" y="1719072"/>
+            <a:ext cx="4297680" cy="4762"/>
           </a:xfrm>
           <a:prstGeom prst="rect">
             <a:avLst/>
@@ -7178,7 +6772,733 @@
       </p:sp>
       <p:sp>
         <p:nvSpPr>
-          <p:cNvPr id="27" name="TextBox 26"/>
+          <p:cNvPr id="7" name="TextBox 6"/>
+          <p:cNvSpPr txBox="1"/>
+          <p:nvPr/>
+        </p:nvSpPr>
+        <p:spPr>
+          <a:xfrm>
+            <a:off x="7086600" y="1828800"/>
+            <a:ext cx="3017520" cy="365760"/>
+          </a:xfrm>
+          <a:prstGeom prst="rect">
+            <a:avLst/>
+          </a:prstGeom>
+          <a:noFill/>
+        </p:spPr>
+        <p:txBody>
+          <a:bodyPr wrap="square" lIns="0" rIns="0" tIns="0" bIns="0" anchor="t">
+            <a:spAutoFit/>
+          </a:bodyPr>
+          <a:lstStyle/>
+          <a:p>
+            <a:pPr algn="l">
+              <a:lnSpc>
+                <a:spcPct val="135000"/>
+              </a:lnSpc>
+              <a:spcAft>
+                <a:spcPts val="0"/>
+              </a:spcAft>
+            </a:pPr>
+            <a:r>
+              <a:rPr sz="1300" b="0" i="0">
+                <a:solidFill>
+                  <a:srgbClr val="514A3C"/>
+                </a:solidFill>
+                <a:latin typeface="Segoe UI"/>
+              </a:rPr>
+              <a:t>The real authorisation</a:t>
+            </a:r>
+          </a:p>
+        </p:txBody>
+      </p:sp>
+      <p:sp>
+        <p:nvSpPr>
+          <p:cNvPr id="8" name="TextBox 7"/>
+          <p:cNvSpPr txBox="1"/>
+          <p:nvPr/>
+        </p:nvSpPr>
+        <p:spPr>
+          <a:xfrm>
+            <a:off x="10104120" y="1828800"/>
+            <a:ext cx="1280160" cy="365760"/>
+          </a:xfrm>
+          <a:prstGeom prst="rect">
+            <a:avLst/>
+          </a:prstGeom>
+          <a:noFill/>
+        </p:spPr>
+        <p:txBody>
+          <a:bodyPr wrap="square" lIns="0" rIns="0" tIns="0" bIns="0" anchor="t">
+            <a:spAutoFit/>
+          </a:bodyPr>
+          <a:lstStyle/>
+          <a:p>
+            <a:pPr algn="r">
+              <a:lnSpc>
+                <a:spcPct val="135000"/>
+              </a:lnSpc>
+              <a:spcAft>
+                <a:spcPts val="0"/>
+              </a:spcAft>
+            </a:pPr>
+            <a:r>
+              <a:rPr sz="1150" b="0" i="0">
+                <a:solidFill>
+                  <a:srgbClr val="2C5A4E"/>
+                </a:solidFill>
+                <a:latin typeface="Consolas"/>
+              </a:rPr>
+              <a:t>accepted</a:t>
+            </a:r>
+          </a:p>
+        </p:txBody>
+      </p:sp>
+      <p:sp>
+        <p:nvSpPr>
+          <p:cNvPr id="9" name="Rectangle 8"/>
+          <p:cNvSpPr/>
+          <p:nvPr/>
+        </p:nvSpPr>
+        <p:spPr>
+          <a:xfrm>
+            <a:off x="7086600" y="2231136"/>
+            <a:ext cx="4297680" cy="4762"/>
+          </a:xfrm>
+          <a:prstGeom prst="rect">
+            <a:avLst/>
+          </a:prstGeom>
+          <a:solidFill>
+            <a:srgbClr val="E8E2D4"/>
+          </a:solidFill>
+          <a:ln>
+            <a:noFill/>
+          </a:ln>
+          <a:effectLst/>
+        </p:spPr>
+        <p:style>
+          <a:lnRef idx="1">
+            <a:schemeClr val="accent1"/>
+          </a:lnRef>
+          <a:fillRef idx="3">
+            <a:schemeClr val="accent1"/>
+          </a:fillRef>
+          <a:effectRef idx="2">
+            <a:schemeClr val="accent1"/>
+          </a:effectRef>
+          <a:fontRef idx="minor">
+            <a:schemeClr val="lt1"/>
+          </a:fontRef>
+        </p:style>
+        <p:txBody>
+          <a:bodyPr rtlCol="0" anchor="ctr"/>
+          <a:lstStyle/>
+          <a:p>
+            <a:pPr algn="ctr"/>
+          </a:p>
+        </p:txBody>
+      </p:sp>
+      <p:sp>
+        <p:nvSpPr>
+          <p:cNvPr id="10" name="TextBox 9"/>
+          <p:cNvSpPr txBox="1"/>
+          <p:nvPr/>
+        </p:nvSpPr>
+        <p:spPr>
+          <a:xfrm>
+            <a:off x="7086600" y="2340864"/>
+            <a:ext cx="3017520" cy="365760"/>
+          </a:xfrm>
+          <a:prstGeom prst="rect">
+            <a:avLst/>
+          </a:prstGeom>
+          <a:noFill/>
+        </p:spPr>
+        <p:txBody>
+          <a:bodyPr wrap="square" lIns="0" rIns="0" tIns="0" bIns="0" anchor="t">
+            <a:spAutoFit/>
+          </a:bodyPr>
+          <a:lstStyle/>
+          <a:p>
+            <a:pPr algn="l">
+              <a:lnSpc>
+                <a:spcPct val="135000"/>
+              </a:lnSpc>
+              <a:spcAft>
+                <a:spcPts val="0"/>
+              </a:spcAft>
+            </a:pPr>
+            <a:r>
+              <a:rPr sz="1300" b="0" i="0">
+                <a:solidFill>
+                  <a:srgbClr val="514A3C"/>
+                </a:solidFill>
+                <a:latin typeface="Segoe UI"/>
+              </a:rPr>
+              <a:t>Replayed at another milestone</a:t>
+            </a:r>
+          </a:p>
+        </p:txBody>
+      </p:sp>
+      <p:sp>
+        <p:nvSpPr>
+          <p:cNvPr id="11" name="TextBox 10"/>
+          <p:cNvSpPr txBox="1"/>
+          <p:nvPr/>
+        </p:nvSpPr>
+        <p:spPr>
+          <a:xfrm>
+            <a:off x="10104120" y="2340864"/>
+            <a:ext cx="1280160" cy="365760"/>
+          </a:xfrm>
+          <a:prstGeom prst="rect">
+            <a:avLst/>
+          </a:prstGeom>
+          <a:noFill/>
+        </p:spPr>
+        <p:txBody>
+          <a:bodyPr wrap="square" lIns="0" rIns="0" tIns="0" bIns="0" anchor="t">
+            <a:spAutoFit/>
+          </a:bodyPr>
+          <a:lstStyle/>
+          <a:p>
+            <a:pPr algn="r">
+              <a:lnSpc>
+                <a:spcPct val="135000"/>
+              </a:lnSpc>
+              <a:spcAft>
+                <a:spcPts val="0"/>
+              </a:spcAft>
+            </a:pPr>
+            <a:r>
+              <a:rPr sz="1150" b="0" i="0">
+                <a:solidFill>
+                  <a:srgbClr val="A23B2C"/>
+                </a:solidFill>
+                <a:latin typeface="Consolas"/>
+              </a:rPr>
+              <a:t>refused</a:t>
+            </a:r>
+          </a:p>
+        </p:txBody>
+      </p:sp>
+      <p:sp>
+        <p:nvSpPr>
+          <p:cNvPr id="12" name="Rectangle 11"/>
+          <p:cNvSpPr/>
+          <p:nvPr/>
+        </p:nvSpPr>
+        <p:spPr>
+          <a:xfrm>
+            <a:off x="7086600" y="2743200"/>
+            <a:ext cx="4297680" cy="4762"/>
+          </a:xfrm>
+          <a:prstGeom prst="rect">
+            <a:avLst/>
+          </a:prstGeom>
+          <a:solidFill>
+            <a:srgbClr val="E8E2D4"/>
+          </a:solidFill>
+          <a:ln>
+            <a:noFill/>
+          </a:ln>
+          <a:effectLst/>
+        </p:spPr>
+        <p:style>
+          <a:lnRef idx="1">
+            <a:schemeClr val="accent1"/>
+          </a:lnRef>
+          <a:fillRef idx="3">
+            <a:schemeClr val="accent1"/>
+          </a:fillRef>
+          <a:effectRef idx="2">
+            <a:schemeClr val="accent1"/>
+          </a:effectRef>
+          <a:fontRef idx="minor">
+            <a:schemeClr val="lt1"/>
+          </a:fontRef>
+        </p:style>
+        <p:txBody>
+          <a:bodyPr rtlCol="0" anchor="ctr"/>
+          <a:lstStyle/>
+          <a:p>
+            <a:pPr algn="ctr"/>
+          </a:p>
+        </p:txBody>
+      </p:sp>
+      <p:sp>
+        <p:nvSpPr>
+          <p:cNvPr id="13" name="TextBox 12"/>
+          <p:cNvSpPr txBox="1"/>
+          <p:nvPr/>
+        </p:nvSpPr>
+        <p:spPr>
+          <a:xfrm>
+            <a:off x="7086600" y="2852928"/>
+            <a:ext cx="3017520" cy="365760"/>
+          </a:xfrm>
+          <a:prstGeom prst="rect">
+            <a:avLst/>
+          </a:prstGeom>
+          <a:noFill/>
+        </p:spPr>
+        <p:txBody>
+          <a:bodyPr wrap="square" lIns="0" rIns="0" tIns="0" bIns="0" anchor="t">
+            <a:spAutoFit/>
+          </a:bodyPr>
+          <a:lstStyle/>
+          <a:p>
+            <a:pPr algn="l">
+              <a:lnSpc>
+                <a:spcPct val="135000"/>
+              </a:lnSpc>
+              <a:spcAft>
+                <a:spcPts val="0"/>
+              </a:spcAft>
+            </a:pPr>
+            <a:r>
+              <a:rPr sz="1300" b="0" i="0">
+                <a:solidFill>
+                  <a:srgbClr val="514A3C"/>
+                </a:solidFill>
+                <a:latin typeface="Segoe UI"/>
+              </a:rPr>
+              <a:t>Claimed from the contractor</a:t>
+            </a:r>
+          </a:p>
+        </p:txBody>
+      </p:sp>
+      <p:sp>
+        <p:nvSpPr>
+          <p:cNvPr id="14" name="TextBox 13"/>
+          <p:cNvSpPr txBox="1"/>
+          <p:nvPr/>
+        </p:nvSpPr>
+        <p:spPr>
+          <a:xfrm>
+            <a:off x="10104120" y="2852928"/>
+            <a:ext cx="1280160" cy="365760"/>
+          </a:xfrm>
+          <a:prstGeom prst="rect">
+            <a:avLst/>
+          </a:prstGeom>
+          <a:noFill/>
+        </p:spPr>
+        <p:txBody>
+          <a:bodyPr wrap="square" lIns="0" rIns="0" tIns="0" bIns="0" anchor="t">
+            <a:spAutoFit/>
+          </a:bodyPr>
+          <a:lstStyle/>
+          <a:p>
+            <a:pPr algn="r">
+              <a:lnSpc>
+                <a:spcPct val="135000"/>
+              </a:lnSpc>
+              <a:spcAft>
+                <a:spcPts val="0"/>
+              </a:spcAft>
+            </a:pPr>
+            <a:r>
+              <a:rPr sz="1150" b="0" i="0">
+                <a:solidFill>
+                  <a:srgbClr val="A23B2C"/>
+                </a:solidFill>
+                <a:latin typeface="Consolas"/>
+              </a:rPr>
+              <a:t>refused</a:t>
+            </a:r>
+          </a:p>
+        </p:txBody>
+      </p:sp>
+      <p:sp>
+        <p:nvSpPr>
+          <p:cNvPr id="15" name="Rectangle 14"/>
+          <p:cNvSpPr/>
+          <p:nvPr/>
+        </p:nvSpPr>
+        <p:spPr>
+          <a:xfrm>
+            <a:off x="7086600" y="3255264"/>
+            <a:ext cx="4297680" cy="4762"/>
+          </a:xfrm>
+          <a:prstGeom prst="rect">
+            <a:avLst/>
+          </a:prstGeom>
+          <a:solidFill>
+            <a:srgbClr val="E8E2D4"/>
+          </a:solidFill>
+          <a:ln>
+            <a:noFill/>
+          </a:ln>
+          <a:effectLst/>
+        </p:spPr>
+        <p:style>
+          <a:lnRef idx="1">
+            <a:schemeClr val="accent1"/>
+          </a:lnRef>
+          <a:fillRef idx="3">
+            <a:schemeClr val="accent1"/>
+          </a:fillRef>
+          <a:effectRef idx="2">
+            <a:schemeClr val="accent1"/>
+          </a:effectRef>
+          <a:fontRef idx="minor">
+            <a:schemeClr val="lt1"/>
+          </a:fontRef>
+        </p:style>
+        <p:txBody>
+          <a:bodyPr rtlCol="0" anchor="ctr"/>
+          <a:lstStyle/>
+          <a:p>
+            <a:pPr algn="ctr"/>
+          </a:p>
+        </p:txBody>
+      </p:sp>
+      <p:sp>
+        <p:nvSpPr>
+          <p:cNvPr id="16" name="TextBox 15"/>
+          <p:cNvSpPr txBox="1"/>
+          <p:nvPr/>
+        </p:nvSpPr>
+        <p:spPr>
+          <a:xfrm>
+            <a:off x="7086600" y="3364992"/>
+            <a:ext cx="3017520" cy="365760"/>
+          </a:xfrm>
+          <a:prstGeom prst="rect">
+            <a:avLst/>
+          </a:prstGeom>
+          <a:noFill/>
+        </p:spPr>
+        <p:txBody>
+          <a:bodyPr wrap="square" lIns="0" rIns="0" tIns="0" bIns="0" anchor="t">
+            <a:spAutoFit/>
+          </a:bodyPr>
+          <a:lstStyle/>
+          <a:p>
+            <a:pPr algn="l">
+              <a:lnSpc>
+                <a:spcPct val="135000"/>
+              </a:lnSpc>
+              <a:spcAft>
+                <a:spcPts val="0"/>
+              </a:spcAft>
+            </a:pPr>
+            <a:r>
+              <a:rPr sz="1300" b="0" i="0">
+                <a:solidFill>
+                  <a:srgbClr val="514A3C"/>
+                </a:solidFill>
+                <a:latin typeface="Segoe UI"/>
+              </a:rPr>
+              <a:t>Addressed to another account</a:t>
+            </a:r>
+          </a:p>
+        </p:txBody>
+      </p:sp>
+      <p:sp>
+        <p:nvSpPr>
+          <p:cNvPr id="17" name="TextBox 16"/>
+          <p:cNvSpPr txBox="1"/>
+          <p:nvPr/>
+        </p:nvSpPr>
+        <p:spPr>
+          <a:xfrm>
+            <a:off x="10104120" y="3364992"/>
+            <a:ext cx="1280160" cy="365760"/>
+          </a:xfrm>
+          <a:prstGeom prst="rect">
+            <a:avLst/>
+          </a:prstGeom>
+          <a:noFill/>
+        </p:spPr>
+        <p:txBody>
+          <a:bodyPr wrap="square" lIns="0" rIns="0" tIns="0" bIns="0" anchor="t">
+            <a:spAutoFit/>
+          </a:bodyPr>
+          <a:lstStyle/>
+          <a:p>
+            <a:pPr algn="r">
+              <a:lnSpc>
+                <a:spcPct val="135000"/>
+              </a:lnSpc>
+              <a:spcAft>
+                <a:spcPts val="0"/>
+              </a:spcAft>
+            </a:pPr>
+            <a:r>
+              <a:rPr sz="1150" b="0" i="0">
+                <a:solidFill>
+                  <a:srgbClr val="A23B2C"/>
+                </a:solidFill>
+                <a:latin typeface="Consolas"/>
+              </a:rPr>
+              <a:t>refused</a:t>
+            </a:r>
+          </a:p>
+        </p:txBody>
+      </p:sp>
+      <p:sp>
+        <p:nvSpPr>
+          <p:cNvPr id="18" name="Rectangle 17"/>
+          <p:cNvSpPr/>
+          <p:nvPr/>
+        </p:nvSpPr>
+        <p:spPr>
+          <a:xfrm>
+            <a:off x="7086600" y="3767328"/>
+            <a:ext cx="4297680" cy="4762"/>
+          </a:xfrm>
+          <a:prstGeom prst="rect">
+            <a:avLst/>
+          </a:prstGeom>
+          <a:solidFill>
+            <a:srgbClr val="E8E2D4"/>
+          </a:solidFill>
+          <a:ln>
+            <a:noFill/>
+          </a:ln>
+          <a:effectLst/>
+        </p:spPr>
+        <p:style>
+          <a:lnRef idx="1">
+            <a:schemeClr val="accent1"/>
+          </a:lnRef>
+          <a:fillRef idx="3">
+            <a:schemeClr val="accent1"/>
+          </a:fillRef>
+          <a:effectRef idx="2">
+            <a:schemeClr val="accent1"/>
+          </a:effectRef>
+          <a:fontRef idx="minor">
+            <a:schemeClr val="lt1"/>
+          </a:fontRef>
+        </p:style>
+        <p:txBody>
+          <a:bodyPr rtlCol="0" anchor="ctr"/>
+          <a:lstStyle/>
+          <a:p>
+            <a:pPr algn="ctr"/>
+          </a:p>
+        </p:txBody>
+      </p:sp>
+      <p:sp>
+        <p:nvSpPr>
+          <p:cNvPr id="19" name="TextBox 18"/>
+          <p:cNvSpPr txBox="1"/>
+          <p:nvPr/>
+        </p:nvSpPr>
+        <p:spPr>
+          <a:xfrm>
+            <a:off x="7086600" y="3877056"/>
+            <a:ext cx="3017520" cy="365760"/>
+          </a:xfrm>
+          <a:prstGeom prst="rect">
+            <a:avLst/>
+          </a:prstGeom>
+          <a:noFill/>
+        </p:spPr>
+        <p:txBody>
+          <a:bodyPr wrap="square" lIns="0" rIns="0" tIns="0" bIns="0" anchor="t">
+            <a:spAutoFit/>
+          </a:bodyPr>
+          <a:lstStyle/>
+          <a:p>
+            <a:pPr algn="l">
+              <a:lnSpc>
+                <a:spcPct val="135000"/>
+              </a:lnSpc>
+              <a:spcAft>
+                <a:spcPts val="0"/>
+              </a:spcAft>
+            </a:pPr>
+            <a:r>
+              <a:rPr sz="1300" b="0" i="0">
+                <a:solidFill>
+                  <a:srgbClr val="514A3C"/>
+                </a:solidFill>
+                <a:latin typeface="Segoe UI"/>
+              </a:rPr>
+              <a:t>A hash that does not exist</a:t>
+            </a:r>
+          </a:p>
+        </p:txBody>
+      </p:sp>
+      <p:sp>
+        <p:nvSpPr>
+          <p:cNvPr id="20" name="TextBox 19"/>
+          <p:cNvSpPr txBox="1"/>
+          <p:nvPr/>
+        </p:nvSpPr>
+        <p:spPr>
+          <a:xfrm>
+            <a:off x="10104120" y="3877056"/>
+            <a:ext cx="1280160" cy="365760"/>
+          </a:xfrm>
+          <a:prstGeom prst="rect">
+            <a:avLst/>
+          </a:prstGeom>
+          <a:noFill/>
+        </p:spPr>
+        <p:txBody>
+          <a:bodyPr wrap="square" lIns="0" rIns="0" tIns="0" bIns="0" anchor="t">
+            <a:spAutoFit/>
+          </a:bodyPr>
+          <a:lstStyle/>
+          <a:p>
+            <a:pPr algn="r">
+              <a:lnSpc>
+                <a:spcPct val="135000"/>
+              </a:lnSpc>
+              <a:spcAft>
+                <a:spcPts val="0"/>
+              </a:spcAft>
+            </a:pPr>
+            <a:r>
+              <a:rPr sz="1150" b="0" i="0">
+                <a:solidFill>
+                  <a:srgbClr val="A23B2C"/>
+                </a:solidFill>
+                <a:latin typeface="Consolas"/>
+              </a:rPr>
+              <a:t>refused</a:t>
+            </a:r>
+          </a:p>
+        </p:txBody>
+      </p:sp>
+      <p:sp>
+        <p:nvSpPr>
+          <p:cNvPr id="21" name="Rectangle 20"/>
+          <p:cNvSpPr/>
+          <p:nvPr/>
+        </p:nvSpPr>
+        <p:spPr>
+          <a:xfrm>
+            <a:off x="7086600" y="4279392"/>
+            <a:ext cx="4297680" cy="4762"/>
+          </a:xfrm>
+          <a:prstGeom prst="rect">
+            <a:avLst/>
+          </a:prstGeom>
+          <a:solidFill>
+            <a:srgbClr val="E8E2D4"/>
+          </a:solidFill>
+          <a:ln>
+            <a:noFill/>
+          </a:ln>
+          <a:effectLst/>
+        </p:spPr>
+        <p:style>
+          <a:lnRef idx="1">
+            <a:schemeClr val="accent1"/>
+          </a:lnRef>
+          <a:fillRef idx="3">
+            <a:schemeClr val="accent1"/>
+          </a:fillRef>
+          <a:effectRef idx="2">
+            <a:schemeClr val="accent1"/>
+          </a:effectRef>
+          <a:fontRef idx="minor">
+            <a:schemeClr val="lt1"/>
+          </a:fontRef>
+        </p:style>
+        <p:txBody>
+          <a:bodyPr rtlCol="0" anchor="ctr"/>
+          <a:lstStyle/>
+          <a:p>
+            <a:pPr algn="ctr"/>
+          </a:p>
+        </p:txBody>
+      </p:sp>
+      <p:sp>
+        <p:nvSpPr>
+          <p:cNvPr id="22" name="TextBox 21"/>
+          <p:cNvSpPr txBox="1"/>
+          <p:nvPr/>
+        </p:nvSpPr>
+        <p:spPr>
+          <a:xfrm>
+            <a:off x="7086600" y="4535424"/>
+            <a:ext cx="4297680" cy="731520"/>
+          </a:xfrm>
+          <a:prstGeom prst="rect">
+            <a:avLst/>
+          </a:prstGeom>
+          <a:noFill/>
+        </p:spPr>
+        <p:txBody>
+          <a:bodyPr wrap="square" lIns="0" rIns="0" tIns="0" bIns="0" anchor="t">
+            <a:spAutoFit/>
+          </a:bodyPr>
+          <a:lstStyle/>
+          <a:p>
+            <a:pPr algn="l">
+              <a:lnSpc>
+                <a:spcPct val="145000"/>
+              </a:lnSpc>
+              <a:spcAft>
+                <a:spcPts val="0"/>
+              </a:spcAft>
+            </a:pPr>
+            <a:r>
+              <a:rPr sz="1250" b="0" i="0">
+                <a:solidFill>
+                  <a:srgbClr val="8C8467"/>
+                </a:solidFill>
+                <a:latin typeface="Segoe UI"/>
+              </a:rPr>
+              <a:t>Measured against a real signature on testnet, not asserted.</a:t>
+            </a:r>
+          </a:p>
+        </p:txBody>
+      </p:sp>
+      <p:sp>
+        <p:nvSpPr>
+          <p:cNvPr id="23" name="Rectangle 22"/>
+          <p:cNvSpPr/>
+          <p:nvPr/>
+        </p:nvSpPr>
+        <p:spPr>
+          <a:xfrm>
+            <a:off x="777240" y="6199632"/>
+            <a:ext cx="10637215" cy="4762"/>
+          </a:xfrm>
+          <a:prstGeom prst="rect">
+            <a:avLst/>
+          </a:prstGeom>
+          <a:solidFill>
+            <a:srgbClr val="DED7C6"/>
+          </a:solidFill>
+          <a:ln>
+            <a:noFill/>
+          </a:ln>
+          <a:effectLst/>
+        </p:spPr>
+        <p:style>
+          <a:lnRef idx="1">
+            <a:schemeClr val="accent1"/>
+          </a:lnRef>
+          <a:fillRef idx="3">
+            <a:schemeClr val="accent1"/>
+          </a:fillRef>
+          <a:effectRef idx="2">
+            <a:schemeClr val="accent1"/>
+          </a:effectRef>
+          <a:fontRef idx="minor">
+            <a:schemeClr val="lt1"/>
+          </a:fontRef>
+        </p:style>
+        <p:txBody>
+          <a:bodyPr rtlCol="0" anchor="ctr"/>
+          <a:lstStyle/>
+          <a:p>
+            <a:pPr algn="ctr"/>
+          </a:p>
+        </p:txBody>
+      </p:sp>
+      <p:sp>
+        <p:nvSpPr>
+          <p:cNvPr id="24" name="TextBox 23"/>
           <p:cNvSpPr txBox="1"/>
           <p:nvPr/>
         </p:nvSpPr>
@@ -7209,18 +7529,18 @@
             <a:r>
               <a:rPr sz="950" b="0" i="0" spc="12">
                 <a:solidFill>
-                  <a:srgbClr val="7D766A"/>
+                  <a:srgbClr val="8C8467"/>
                 </a:solidFill>
                 <a:latin typeface="Consolas"/>
               </a:rPr>
-              <a:t>KIRIM  ·  XRPL TESTNET</a:t>
-            </a:r>
-          </a:p>
-        </p:txBody>
-      </p:sp>
-      <p:sp>
-        <p:nvSpPr>
-          <p:cNvPr id="28" name="TextBox 27"/>
+              <a:t>KIRIM</a:t>
+            </a:r>
+          </a:p>
+        </p:txBody>
+      </p:sp>
+      <p:sp>
+        <p:nvSpPr>
+          <p:cNvPr id="25" name="TextBox 24"/>
           <p:cNvSpPr txBox="1"/>
           <p:nvPr/>
         </p:nvSpPr>
@@ -7251,11 +7571,11 @@
             <a:r>
               <a:rPr sz="950" b="0" i="0" spc="12">
                 <a:solidFill>
-                  <a:srgbClr val="7D766A"/>
+                  <a:srgbClr val="8C8467"/>
                 </a:solidFill>
                 <a:latin typeface="Consolas"/>
               </a:rPr>
-              <a:t>11 / PROOF</a:t>
+              <a:t>11 / GOVERNANCE</a:t>
             </a:r>
           </a:p>
         </p:txBody>
@@ -7293,7 +7613,7 @@
             <a:avLst/>
           </a:prstGeom>
           <a:solidFill>
-            <a:srgbClr val="F1ECE1"/>
+            <a:srgbClr val="0F0D09"/>
           </a:solidFill>
           <a:ln>
             <a:noFill/>
@@ -7355,11 +7675,11 @@
             <a:r>
               <a:rPr sz="1050" b="0" i="0" spc="18">
                 <a:solidFill>
-                  <a:srgbClr val="8C8467"/>
+                  <a:srgbClr val="7D766A"/>
                 </a:solidFill>
                 <a:latin typeface="Consolas"/>
               </a:rPr>
-              <a:t>THE BUSINESS</a:t>
+              <a:t>PROOF</a:t>
             </a:r>
           </a:p>
         </p:txBody>
@@ -7395,13 +7715,13 @@
               </a:spcAft>
             </a:pPr>
             <a:r>
-              <a:rPr sz="3200" b="0" i="0">
-                <a:solidFill>
-                  <a:srgbClr val="17130D"/>
+              <a:rPr sz="3600" b="0" i="0">
+                <a:solidFill>
+                  <a:srgbClr val="D9D3C5"/>
                 </a:solidFill>
                 <a:latin typeface="Georgia"/>
               </a:rPr>
-              <a:t>We charge for the release, because that is where the risk is.</a:t>
+              <a:t>Every payment on this slide is real.</a:t>
             </a:r>
           </a:p>
         </p:txBody>
@@ -7414,8 +7734,8 @@
         </p:nvSpPr>
         <p:spPr>
           <a:xfrm>
-            <a:off x="777240" y="1965960"/>
-            <a:ext cx="5486400" cy="2194560"/>
+            <a:off x="777240" y="1783080"/>
+            <a:ext cx="10607040" cy="457200"/>
           </a:xfrm>
           <a:prstGeom prst="rect">
             <a:avLst/>
@@ -7430,39 +7750,20 @@
           <a:p>
             <a:pPr algn="l">
               <a:lnSpc>
-                <a:spcPct val="155000"/>
-              </a:lnSpc>
-              <a:spcAft>
-                <a:spcPts val="1600"/>
-              </a:spcAft>
-            </a:pPr>
-            <a:r>
-              <a:rPr sz="1550" b="0" i="0">
-                <a:solidFill>
-                  <a:srgbClr val="514A3C"/>
+                <a:spcPct val="135000"/>
+              </a:lnSpc>
+              <a:spcAft>
+                <a:spcPts val="0"/>
+              </a:spcAft>
+            </a:pPr>
+            <a:r>
+              <a:rPr sz="1400" b="0" i="0">
+                <a:solidFill>
+                  <a:srgbClr val="9B9483"/>
                 </a:solidFill>
                 <a:latin typeface="Segoe UI"/>
               </a:rPr>
-              <a:t>Kirim takes 0.8% of each released milestone, paid by the client at the moment of release. A licensed escrow agent charges 3–5% and takes days; a lawyer's stakeholder account costs more than the milestone.</a:t>
-            </a:r>
-          </a:p>
-          <a:p>
-            <a:pPr>
-              <a:lnSpc>
-                <a:spcPct val="155000"/>
-              </a:lnSpc>
-              <a:spcAft>
-                <a:spcPts val="0"/>
-              </a:spcAft>
-            </a:pPr>
-            <a:r>
-              <a:rPr sz="1550" b="0" i="0">
-                <a:solidFill>
-                  <a:srgbClr val="514A3C"/>
-                </a:solidFill>
-                <a:latin typeface="Segoe UI"/>
-              </a:rPr>
-              <a:t>The evidence checks are bought per milestone at cents apiece, so the cost of assurance no longer scales with a site visit.</a:t>
+              <a:t>XRP Ledger Testnet, from one run of all six milestones. Evidence is bought over the Machine Payments Protocol. Supply is simulated — the contractor, the photographs, the inspector. The ledger is not.</a:t>
             </a:r>
           </a:p>
         </p:txBody>
@@ -7475,8 +7776,862 @@
         </p:nvSpPr>
         <p:spPr>
           <a:xfrm>
-            <a:off x="7086600" y="1764791"/>
-            <a:ext cx="4297680" cy="4762"/>
+            <a:off x="777240" y="2386584"/>
+            <a:ext cx="10637215" cy="4762"/>
+          </a:xfrm>
+          <a:prstGeom prst="rect">
+            <a:avLst/>
+          </a:prstGeom>
+          <a:solidFill>
+            <a:srgbClr val="262119"/>
+          </a:solidFill>
+          <a:ln>
+            <a:noFill/>
+          </a:ln>
+          <a:effectLst/>
+        </p:spPr>
+        <p:style>
+          <a:lnRef idx="1">
+            <a:schemeClr val="accent1"/>
+          </a:lnRef>
+          <a:fillRef idx="3">
+            <a:schemeClr val="accent1"/>
+          </a:fillRef>
+          <a:effectRef idx="2">
+            <a:schemeClr val="accent1"/>
+          </a:effectRef>
+          <a:fontRef idx="minor">
+            <a:schemeClr val="lt1"/>
+          </a:fontRef>
+        </p:style>
+        <p:txBody>
+          <a:bodyPr rtlCol="0" anchor="ctr"/>
+          <a:lstStyle/>
+          <a:p>
+            <a:pPr algn="ctr"/>
+          </a:p>
+        </p:txBody>
+      </p:sp>
+      <p:sp>
+        <p:nvSpPr>
+          <p:cNvPr id="7" name="TextBox 6"/>
+          <p:cNvSpPr txBox="1"/>
+          <p:nvPr/>
+        </p:nvSpPr>
+        <p:spPr>
+          <a:xfrm>
+            <a:off x="777240" y="2514600"/>
+            <a:ext cx="3200400" cy="292608"/>
+          </a:xfrm>
+          <a:prstGeom prst="rect">
+            <a:avLst/>
+          </a:prstGeom>
+          <a:noFill/>
+        </p:spPr>
+        <p:txBody>
+          <a:bodyPr wrap="square" lIns="0" rIns="0" tIns="0" bIns="0" anchor="t">
+            <a:spAutoFit/>
+          </a:bodyPr>
+          <a:lstStyle/>
+          <a:p>
+            <a:pPr algn="l">
+              <a:lnSpc>
+                <a:spcPct val="135000"/>
+              </a:lnSpc>
+              <a:spcAft>
+                <a:spcPts val="0"/>
+              </a:spcAft>
+            </a:pPr>
+            <a:r>
+              <a:rPr sz="1250" b="0" i="0">
+                <a:solidFill>
+                  <a:srgbClr val="D9D3C5"/>
+                </a:solidFill>
+                <a:latin typeface="Segoe UI"/>
+              </a:rPr>
+              <a:t>M1 escrow funded</a:t>
+            </a:r>
+          </a:p>
+        </p:txBody>
+      </p:sp>
+      <p:sp>
+        <p:nvSpPr>
+          <p:cNvPr id="8" name="TextBox 7"/>
+          <p:cNvSpPr txBox="1"/>
+          <p:nvPr/>
+        </p:nvSpPr>
+        <p:spPr>
+          <a:xfrm>
+            <a:off x="4069080" y="2532888"/>
+            <a:ext cx="7315200" cy="292608"/>
+          </a:xfrm>
+          <a:prstGeom prst="rect">
+            <a:avLst/>
+          </a:prstGeom>
+          <a:noFill/>
+        </p:spPr>
+        <p:txBody>
+          <a:bodyPr wrap="square" lIns="0" rIns="0" tIns="0" bIns="0" anchor="t">
+            <a:spAutoFit/>
+          </a:bodyPr>
+          <a:lstStyle/>
+          <a:p>
+            <a:pPr algn="l">
+              <a:lnSpc>
+                <a:spcPct val="135000"/>
+              </a:lnSpc>
+              <a:spcAft>
+                <a:spcPts val="0"/>
+              </a:spcAft>
+            </a:pPr>
+            <a:r>
+              <a:rPr sz="1050" b="0" i="0">
+                <a:solidFill>
+                  <a:srgbClr val="5E9B79"/>
+                </a:solidFill>
+                <a:latin typeface="Consolas"/>
+              </a:rPr>
+              <a:t>DB2C321D1C41C72440227725382A8C4390F2373B196E665259E47869C3A332C7</a:t>
+            </a:r>
+          </a:p>
+        </p:txBody>
+      </p:sp>
+      <p:sp>
+        <p:nvSpPr>
+          <p:cNvPr id="9" name="Rectangle 8"/>
+          <p:cNvSpPr/>
+          <p:nvPr/>
+        </p:nvSpPr>
+        <p:spPr>
+          <a:xfrm>
+            <a:off x="777240" y="2825496"/>
+            <a:ext cx="10637215" cy="4762"/>
+          </a:xfrm>
+          <a:prstGeom prst="rect">
+            <a:avLst/>
+          </a:prstGeom>
+          <a:solidFill>
+            <a:srgbClr val="262119"/>
+          </a:solidFill>
+          <a:ln>
+            <a:noFill/>
+          </a:ln>
+          <a:effectLst/>
+        </p:spPr>
+        <p:style>
+          <a:lnRef idx="1">
+            <a:schemeClr val="accent1"/>
+          </a:lnRef>
+          <a:fillRef idx="3">
+            <a:schemeClr val="accent1"/>
+          </a:fillRef>
+          <a:effectRef idx="2">
+            <a:schemeClr val="accent1"/>
+          </a:effectRef>
+          <a:fontRef idx="minor">
+            <a:schemeClr val="lt1"/>
+          </a:fontRef>
+        </p:style>
+        <p:txBody>
+          <a:bodyPr rtlCol="0" anchor="ctr"/>
+          <a:lstStyle/>
+          <a:p>
+            <a:pPr algn="ctr"/>
+          </a:p>
+        </p:txBody>
+      </p:sp>
+      <p:sp>
+        <p:nvSpPr>
+          <p:cNvPr id="10" name="TextBox 9"/>
+          <p:cNvSpPr txBox="1"/>
+          <p:nvPr/>
+        </p:nvSpPr>
+        <p:spPr>
+          <a:xfrm>
+            <a:off x="777240" y="2935224"/>
+            <a:ext cx="3200400" cy="292608"/>
+          </a:xfrm>
+          <a:prstGeom prst="rect">
+            <a:avLst/>
+          </a:prstGeom>
+          <a:noFill/>
+        </p:spPr>
+        <p:txBody>
+          <a:bodyPr wrap="square" lIns="0" rIns="0" tIns="0" bIns="0" anchor="t">
+            <a:spAutoFit/>
+          </a:bodyPr>
+          <a:lstStyle/>
+          <a:p>
+            <a:pPr algn="l">
+              <a:lnSpc>
+                <a:spcPct val="135000"/>
+              </a:lnSpc>
+              <a:spcAft>
+                <a:spcPts val="0"/>
+              </a:spcAft>
+            </a:pPr>
+            <a:r>
+              <a:rPr sz="1250" b="0" i="0">
+                <a:solidFill>
+                  <a:srgbClr val="D9D3C5"/>
+                </a:solidFill>
+                <a:latin typeface="Segoe UI"/>
+              </a:rPr>
+              <a:t>MPP — evidence check paid</a:t>
+            </a:r>
+          </a:p>
+        </p:txBody>
+      </p:sp>
+      <p:sp>
+        <p:nvSpPr>
+          <p:cNvPr id="11" name="TextBox 10"/>
+          <p:cNvSpPr txBox="1"/>
+          <p:nvPr/>
+        </p:nvSpPr>
+        <p:spPr>
+          <a:xfrm>
+            <a:off x="4069080" y="2953512"/>
+            <a:ext cx="7315200" cy="292608"/>
+          </a:xfrm>
+          <a:prstGeom prst="rect">
+            <a:avLst/>
+          </a:prstGeom>
+          <a:noFill/>
+        </p:spPr>
+        <p:txBody>
+          <a:bodyPr wrap="square" lIns="0" rIns="0" tIns="0" bIns="0" anchor="t">
+            <a:spAutoFit/>
+          </a:bodyPr>
+          <a:lstStyle/>
+          <a:p>
+            <a:pPr algn="l">
+              <a:lnSpc>
+                <a:spcPct val="135000"/>
+              </a:lnSpc>
+              <a:spcAft>
+                <a:spcPts val="0"/>
+              </a:spcAft>
+            </a:pPr>
+            <a:r>
+              <a:rPr sz="1050" b="0" i="0">
+                <a:solidFill>
+                  <a:srgbClr val="5E9B79"/>
+                </a:solidFill>
+                <a:latin typeface="Consolas"/>
+              </a:rPr>
+              <a:t>21EF14A8EBC9925E26AB013DBD7865FC30A9656D156E84B2F4B3802AA0F32D03</a:t>
+            </a:r>
+          </a:p>
+        </p:txBody>
+      </p:sp>
+      <p:sp>
+        <p:nvSpPr>
+          <p:cNvPr id="12" name="Rectangle 11"/>
+          <p:cNvSpPr/>
+          <p:nvPr/>
+        </p:nvSpPr>
+        <p:spPr>
+          <a:xfrm>
+            <a:off x="777240" y="3246120"/>
+            <a:ext cx="10637215" cy="4762"/>
+          </a:xfrm>
+          <a:prstGeom prst="rect">
+            <a:avLst/>
+          </a:prstGeom>
+          <a:solidFill>
+            <a:srgbClr val="262119"/>
+          </a:solidFill>
+          <a:ln>
+            <a:noFill/>
+          </a:ln>
+          <a:effectLst/>
+        </p:spPr>
+        <p:style>
+          <a:lnRef idx="1">
+            <a:schemeClr val="accent1"/>
+          </a:lnRef>
+          <a:fillRef idx="3">
+            <a:schemeClr val="accent1"/>
+          </a:fillRef>
+          <a:effectRef idx="2">
+            <a:schemeClr val="accent1"/>
+          </a:effectRef>
+          <a:fontRef idx="minor">
+            <a:schemeClr val="lt1"/>
+          </a:fontRef>
+        </p:style>
+        <p:txBody>
+          <a:bodyPr rtlCol="0" anchor="ctr"/>
+          <a:lstStyle/>
+          <a:p>
+            <a:pPr algn="ctr"/>
+          </a:p>
+        </p:txBody>
+      </p:sp>
+      <p:sp>
+        <p:nvSpPr>
+          <p:cNvPr id="13" name="TextBox 12"/>
+          <p:cNvSpPr txBox="1"/>
+          <p:nvPr/>
+        </p:nvSpPr>
+        <p:spPr>
+          <a:xfrm>
+            <a:off x="777240" y="3355848"/>
+            <a:ext cx="3200400" cy="292608"/>
+          </a:xfrm>
+          <a:prstGeom prst="rect">
+            <a:avLst/>
+          </a:prstGeom>
+          <a:noFill/>
+        </p:spPr>
+        <p:txBody>
+          <a:bodyPr wrap="square" lIns="0" rIns="0" tIns="0" bIns="0" anchor="t">
+            <a:spAutoFit/>
+          </a:bodyPr>
+          <a:lstStyle/>
+          <a:p>
+            <a:pPr algn="l">
+              <a:lnSpc>
+                <a:spcPct val="135000"/>
+              </a:lnSpc>
+              <a:spcAft>
+                <a:spcPts val="0"/>
+              </a:spcAft>
+            </a:pPr>
+            <a:r>
+              <a:rPr sz="1250" b="0" i="0">
+                <a:solidFill>
+                  <a:srgbClr val="D9D3C5"/>
+                </a:solidFill>
+                <a:latin typeface="Segoe UI"/>
+              </a:rPr>
+              <a:t>M1 released to contractor</a:t>
+            </a:r>
+          </a:p>
+        </p:txBody>
+      </p:sp>
+      <p:sp>
+        <p:nvSpPr>
+          <p:cNvPr id="14" name="TextBox 13"/>
+          <p:cNvSpPr txBox="1"/>
+          <p:nvPr/>
+        </p:nvSpPr>
+        <p:spPr>
+          <a:xfrm>
+            <a:off x="4069080" y="3374136"/>
+            <a:ext cx="7315200" cy="292608"/>
+          </a:xfrm>
+          <a:prstGeom prst="rect">
+            <a:avLst/>
+          </a:prstGeom>
+          <a:noFill/>
+        </p:spPr>
+        <p:txBody>
+          <a:bodyPr wrap="square" lIns="0" rIns="0" tIns="0" bIns="0" anchor="t">
+            <a:spAutoFit/>
+          </a:bodyPr>
+          <a:lstStyle/>
+          <a:p>
+            <a:pPr algn="l">
+              <a:lnSpc>
+                <a:spcPct val="135000"/>
+              </a:lnSpc>
+              <a:spcAft>
+                <a:spcPts val="0"/>
+              </a:spcAft>
+            </a:pPr>
+            <a:r>
+              <a:rPr sz="1050" b="0" i="0">
+                <a:solidFill>
+                  <a:srgbClr val="5E9B79"/>
+                </a:solidFill>
+                <a:latin typeface="Consolas"/>
+              </a:rPr>
+              <a:t>28F9F75CB532EFF8BBB95A50286CA5CA3196505E97B1C51F852B810162592EFA</a:t>
+            </a:r>
+          </a:p>
+        </p:txBody>
+      </p:sp>
+      <p:sp>
+        <p:nvSpPr>
+          <p:cNvPr id="15" name="Rectangle 14"/>
+          <p:cNvSpPr/>
+          <p:nvPr/>
+        </p:nvSpPr>
+        <p:spPr>
+          <a:xfrm>
+            <a:off x="777240" y="3666744"/>
+            <a:ext cx="10637215" cy="4762"/>
+          </a:xfrm>
+          <a:prstGeom prst="rect">
+            <a:avLst/>
+          </a:prstGeom>
+          <a:solidFill>
+            <a:srgbClr val="262119"/>
+          </a:solidFill>
+          <a:ln>
+            <a:noFill/>
+          </a:ln>
+          <a:effectLst/>
+        </p:spPr>
+        <p:style>
+          <a:lnRef idx="1">
+            <a:schemeClr val="accent1"/>
+          </a:lnRef>
+          <a:fillRef idx="3">
+            <a:schemeClr val="accent1"/>
+          </a:fillRef>
+          <a:effectRef idx="2">
+            <a:schemeClr val="accent1"/>
+          </a:effectRef>
+          <a:fontRef idx="minor">
+            <a:schemeClr val="lt1"/>
+          </a:fontRef>
+        </p:style>
+        <p:txBody>
+          <a:bodyPr rtlCol="0" anchor="ctr"/>
+          <a:lstStyle/>
+          <a:p>
+            <a:pPr algn="ctr"/>
+          </a:p>
+        </p:txBody>
+      </p:sp>
+      <p:sp>
+        <p:nvSpPr>
+          <p:cNvPr id="16" name="TextBox 15"/>
+          <p:cNvSpPr txBox="1"/>
+          <p:nvPr/>
+        </p:nvSpPr>
+        <p:spPr>
+          <a:xfrm>
+            <a:off x="777240" y="3776472"/>
+            <a:ext cx="3200400" cy="292608"/>
+          </a:xfrm>
+          <a:prstGeom prst="rect">
+            <a:avLst/>
+          </a:prstGeom>
+          <a:noFill/>
+        </p:spPr>
+        <p:txBody>
+          <a:bodyPr wrap="square" lIns="0" rIns="0" tIns="0" bIns="0" anchor="t">
+            <a:spAutoFit/>
+          </a:bodyPr>
+          <a:lstStyle/>
+          <a:p>
+            <a:pPr algn="l">
+              <a:lnSpc>
+                <a:spcPct val="135000"/>
+              </a:lnSpc>
+              <a:spcAft>
+                <a:spcPts val="0"/>
+              </a:spcAft>
+            </a:pPr>
+            <a:r>
+              <a:rPr sz="1250" b="0" i="0">
+                <a:solidFill>
+                  <a:srgbClr val="D9D3C5"/>
+                </a:solidFill>
+                <a:latin typeface="Segoe UI"/>
+              </a:rPr>
+              <a:t>Kirim's 0.8% fee</a:t>
+            </a:r>
+          </a:p>
+        </p:txBody>
+      </p:sp>
+      <p:sp>
+        <p:nvSpPr>
+          <p:cNvPr id="17" name="TextBox 16"/>
+          <p:cNvSpPr txBox="1"/>
+          <p:nvPr/>
+        </p:nvSpPr>
+        <p:spPr>
+          <a:xfrm>
+            <a:off x="4069080" y="3794760"/>
+            <a:ext cx="7315200" cy="292608"/>
+          </a:xfrm>
+          <a:prstGeom prst="rect">
+            <a:avLst/>
+          </a:prstGeom>
+          <a:noFill/>
+        </p:spPr>
+        <p:txBody>
+          <a:bodyPr wrap="square" lIns="0" rIns="0" tIns="0" bIns="0" anchor="t">
+            <a:spAutoFit/>
+          </a:bodyPr>
+          <a:lstStyle/>
+          <a:p>
+            <a:pPr algn="l">
+              <a:lnSpc>
+                <a:spcPct val="135000"/>
+              </a:lnSpc>
+              <a:spcAft>
+                <a:spcPts val="0"/>
+              </a:spcAft>
+            </a:pPr>
+            <a:r>
+              <a:rPr sz="1050" b="0" i="0">
+                <a:solidFill>
+                  <a:srgbClr val="5E9B79"/>
+                </a:solidFill>
+                <a:latin typeface="Consolas"/>
+              </a:rPr>
+              <a:t>AB172BC4FF2E188C4EE68C6947DB3BB5A4FB2A644A00BAE2B2E0753B502E6BA0</a:t>
+            </a:r>
+          </a:p>
+        </p:txBody>
+      </p:sp>
+      <p:sp>
+        <p:nvSpPr>
+          <p:cNvPr id="18" name="Rectangle 17"/>
+          <p:cNvSpPr/>
+          <p:nvPr/>
+        </p:nvSpPr>
+        <p:spPr>
+          <a:xfrm>
+            <a:off x="777240" y="4087368"/>
+            <a:ext cx="10637215" cy="4762"/>
+          </a:xfrm>
+          <a:prstGeom prst="rect">
+            <a:avLst/>
+          </a:prstGeom>
+          <a:solidFill>
+            <a:srgbClr val="262119"/>
+          </a:solidFill>
+          <a:ln>
+            <a:noFill/>
+          </a:ln>
+          <a:effectLst/>
+        </p:spPr>
+        <p:style>
+          <a:lnRef idx="1">
+            <a:schemeClr val="accent1"/>
+          </a:lnRef>
+          <a:fillRef idx="3">
+            <a:schemeClr val="accent1"/>
+          </a:fillRef>
+          <a:effectRef idx="2">
+            <a:schemeClr val="accent1"/>
+          </a:effectRef>
+          <a:fontRef idx="minor">
+            <a:schemeClr val="lt1"/>
+          </a:fontRef>
+        </p:style>
+        <p:txBody>
+          <a:bodyPr rtlCol="0" anchor="ctr"/>
+          <a:lstStyle/>
+          <a:p>
+            <a:pPr algn="ctr"/>
+          </a:p>
+        </p:txBody>
+      </p:sp>
+      <p:sp>
+        <p:nvSpPr>
+          <p:cNvPr id="19" name="TextBox 18"/>
+          <p:cNvSpPr txBox="1"/>
+          <p:nvPr/>
+        </p:nvSpPr>
+        <p:spPr>
+          <a:xfrm>
+            <a:off x="777240" y="4197096"/>
+            <a:ext cx="3200400" cy="292608"/>
+          </a:xfrm>
+          <a:prstGeom prst="rect">
+            <a:avLst/>
+          </a:prstGeom>
+          <a:noFill/>
+        </p:spPr>
+        <p:txBody>
+          <a:bodyPr wrap="square" lIns="0" rIns="0" tIns="0" bIns="0" anchor="t">
+            <a:spAutoFit/>
+          </a:bodyPr>
+          <a:lstStyle/>
+          <a:p>
+            <a:pPr algn="l">
+              <a:lnSpc>
+                <a:spcPct val="135000"/>
+              </a:lnSpc>
+              <a:spcAft>
+                <a:spcPts val="0"/>
+              </a:spcAft>
+            </a:pPr>
+            <a:r>
+              <a:rPr sz="1250" b="0" i="0">
+                <a:solidFill>
+                  <a:srgbClr val="D9D3C5"/>
+                </a:solidFill>
+                <a:latin typeface="Segoe UI"/>
+              </a:rPr>
+              <a:t>Client signature (M5)</a:t>
+            </a:r>
+          </a:p>
+        </p:txBody>
+      </p:sp>
+      <p:sp>
+        <p:nvSpPr>
+          <p:cNvPr id="20" name="TextBox 19"/>
+          <p:cNvSpPr txBox="1"/>
+          <p:nvPr/>
+        </p:nvSpPr>
+        <p:spPr>
+          <a:xfrm>
+            <a:off x="4069080" y="4215384"/>
+            <a:ext cx="7315200" cy="292608"/>
+          </a:xfrm>
+          <a:prstGeom prst="rect">
+            <a:avLst/>
+          </a:prstGeom>
+          <a:noFill/>
+        </p:spPr>
+        <p:txBody>
+          <a:bodyPr wrap="square" lIns="0" rIns="0" tIns="0" bIns="0" anchor="t">
+            <a:spAutoFit/>
+          </a:bodyPr>
+          <a:lstStyle/>
+          <a:p>
+            <a:pPr algn="l">
+              <a:lnSpc>
+                <a:spcPct val="135000"/>
+              </a:lnSpc>
+              <a:spcAft>
+                <a:spcPts val="0"/>
+              </a:spcAft>
+            </a:pPr>
+            <a:r>
+              <a:rPr sz="1050" b="0" i="0">
+                <a:solidFill>
+                  <a:srgbClr val="5E9B79"/>
+                </a:solidFill>
+                <a:latin typeface="Consolas"/>
+              </a:rPr>
+              <a:t>0DA1B8119218FE726EEC18FEE6047D7F9C1260E473042FA9034C64D0F140FA70</a:t>
+            </a:r>
+          </a:p>
+        </p:txBody>
+      </p:sp>
+      <p:sp>
+        <p:nvSpPr>
+          <p:cNvPr id="21" name="Rectangle 20"/>
+          <p:cNvSpPr/>
+          <p:nvPr/>
+        </p:nvSpPr>
+        <p:spPr>
+          <a:xfrm>
+            <a:off x="777240" y="4507992"/>
+            <a:ext cx="10637215" cy="4762"/>
+          </a:xfrm>
+          <a:prstGeom prst="rect">
+            <a:avLst/>
+          </a:prstGeom>
+          <a:solidFill>
+            <a:srgbClr val="262119"/>
+          </a:solidFill>
+          <a:ln>
+            <a:noFill/>
+          </a:ln>
+          <a:effectLst/>
+        </p:spPr>
+        <p:style>
+          <a:lnRef idx="1">
+            <a:schemeClr val="accent1"/>
+          </a:lnRef>
+          <a:fillRef idx="3">
+            <a:schemeClr val="accent1"/>
+          </a:fillRef>
+          <a:effectRef idx="2">
+            <a:schemeClr val="accent1"/>
+          </a:effectRef>
+          <a:fontRef idx="minor">
+            <a:schemeClr val="lt1"/>
+          </a:fontRef>
+        </p:style>
+        <p:txBody>
+          <a:bodyPr rtlCol="0" anchor="ctr"/>
+          <a:lstStyle/>
+          <a:p>
+            <a:pPr algn="ctr"/>
+          </a:p>
+        </p:txBody>
+      </p:sp>
+      <p:sp>
+        <p:nvSpPr>
+          <p:cNvPr id="22" name="TextBox 21"/>
+          <p:cNvSpPr txBox="1"/>
+          <p:nvPr/>
+        </p:nvSpPr>
+        <p:spPr>
+          <a:xfrm>
+            <a:off x="777240" y="4617720"/>
+            <a:ext cx="3200400" cy="292608"/>
+          </a:xfrm>
+          <a:prstGeom prst="rect">
+            <a:avLst/>
+          </a:prstGeom>
+          <a:noFill/>
+        </p:spPr>
+        <p:txBody>
+          <a:bodyPr wrap="square" lIns="0" rIns="0" tIns="0" bIns="0" anchor="t">
+            <a:spAutoFit/>
+          </a:bodyPr>
+          <a:lstStyle/>
+          <a:p>
+            <a:pPr algn="l">
+              <a:lnSpc>
+                <a:spcPct val="135000"/>
+              </a:lnSpc>
+              <a:spcAft>
+                <a:spcPts val="0"/>
+              </a:spcAft>
+            </a:pPr>
+            <a:r>
+              <a:rPr sz="1250" b="0" i="0">
+                <a:solidFill>
+                  <a:srgbClr val="D9D3C5"/>
+                </a:solidFill>
+                <a:latin typeface="Segoe UI"/>
+              </a:rPr>
+              <a:t>M6 returned on timeout</a:t>
+            </a:r>
+          </a:p>
+        </p:txBody>
+      </p:sp>
+      <p:sp>
+        <p:nvSpPr>
+          <p:cNvPr id="23" name="TextBox 22"/>
+          <p:cNvSpPr txBox="1"/>
+          <p:nvPr/>
+        </p:nvSpPr>
+        <p:spPr>
+          <a:xfrm>
+            <a:off x="4069080" y="4636008"/>
+            <a:ext cx="7315200" cy="292608"/>
+          </a:xfrm>
+          <a:prstGeom prst="rect">
+            <a:avLst/>
+          </a:prstGeom>
+          <a:noFill/>
+        </p:spPr>
+        <p:txBody>
+          <a:bodyPr wrap="square" lIns="0" rIns="0" tIns="0" bIns="0" anchor="t">
+            <a:spAutoFit/>
+          </a:bodyPr>
+          <a:lstStyle/>
+          <a:p>
+            <a:pPr algn="l">
+              <a:lnSpc>
+                <a:spcPct val="135000"/>
+              </a:lnSpc>
+              <a:spcAft>
+                <a:spcPts val="0"/>
+              </a:spcAft>
+            </a:pPr>
+            <a:r>
+              <a:rPr sz="1050" b="0" i="0">
+                <a:solidFill>
+                  <a:srgbClr val="5E9B79"/>
+                </a:solidFill>
+                <a:latin typeface="Consolas"/>
+              </a:rPr>
+              <a:t>D55A3E67A27B20E848E79A115569F361CF2D240AAD90A293F51F17480E24C2D5</a:t>
+            </a:r>
+          </a:p>
+        </p:txBody>
+      </p:sp>
+      <p:sp>
+        <p:nvSpPr>
+          <p:cNvPr id="24" name="Rectangle 23"/>
+          <p:cNvSpPr/>
+          <p:nvPr/>
+        </p:nvSpPr>
+        <p:spPr>
+          <a:xfrm>
+            <a:off x="777240" y="4928616"/>
+            <a:ext cx="10637215" cy="4762"/>
+          </a:xfrm>
+          <a:prstGeom prst="rect">
+            <a:avLst/>
+          </a:prstGeom>
+          <a:solidFill>
+            <a:srgbClr val="262119"/>
+          </a:solidFill>
+          <a:ln>
+            <a:noFill/>
+          </a:ln>
+          <a:effectLst/>
+        </p:spPr>
+        <p:style>
+          <a:lnRef idx="1">
+            <a:schemeClr val="accent1"/>
+          </a:lnRef>
+          <a:fillRef idx="3">
+            <a:schemeClr val="accent1"/>
+          </a:fillRef>
+          <a:effectRef idx="2">
+            <a:schemeClr val="accent1"/>
+          </a:effectRef>
+          <a:fontRef idx="minor">
+            <a:schemeClr val="lt1"/>
+          </a:fontRef>
+        </p:style>
+        <p:txBody>
+          <a:bodyPr rtlCol="0" anchor="ctr"/>
+          <a:lstStyle/>
+          <a:p>
+            <a:pPr algn="ctr"/>
+          </a:p>
+        </p:txBody>
+      </p:sp>
+      <p:sp>
+        <p:nvSpPr>
+          <p:cNvPr id="25" name="TextBox 24"/>
+          <p:cNvSpPr txBox="1"/>
+          <p:nvPr/>
+        </p:nvSpPr>
+        <p:spPr>
+          <a:xfrm>
+            <a:off x="777240" y="5440680"/>
+            <a:ext cx="10607040" cy="365760"/>
+          </a:xfrm>
+          <a:prstGeom prst="rect">
+            <a:avLst/>
+          </a:prstGeom>
+          <a:noFill/>
+        </p:spPr>
+        <p:txBody>
+          <a:bodyPr wrap="square" lIns="0" rIns="0" tIns="0" bIns="0" anchor="t">
+            <a:spAutoFit/>
+          </a:bodyPr>
+          <a:lstStyle/>
+          <a:p>
+            <a:pPr algn="l">
+              <a:lnSpc>
+                <a:spcPct val="135000"/>
+              </a:lnSpc>
+              <a:spcAft>
+                <a:spcPts val="0"/>
+              </a:spcAft>
+            </a:pPr>
+            <a:r>
+              <a:rPr sz="1100" b="0" i="0">
+                <a:solidFill>
+                  <a:srgbClr val="7D766A"/>
+                </a:solidFill>
+                <a:latin typeface="Consolas"/>
+              </a:rPr>
+              <a:t>testnet.xrpl.org/transactions/&lt;hash&gt;</a:t>
+            </a:r>
+          </a:p>
+        </p:txBody>
+      </p:sp>
+      <p:sp>
+        <p:nvSpPr>
+          <p:cNvPr id="26" name="Rectangle 25"/>
+          <p:cNvSpPr/>
+          <p:nvPr/>
+        </p:nvSpPr>
+        <p:spPr>
+          <a:xfrm>
+            <a:off x="777240" y="6199632"/>
+            <a:ext cx="10637215" cy="4762"/>
           </a:xfrm>
           <a:prstGeom prst="rect">
             <a:avLst/>
@@ -7513,731 +8668,7 @@
       </p:sp>
       <p:sp>
         <p:nvSpPr>
-          <p:cNvPr id="7" name="TextBox 6"/>
-          <p:cNvSpPr txBox="1"/>
-          <p:nvPr/>
-        </p:nvSpPr>
-        <p:spPr>
-          <a:xfrm>
-            <a:off x="7086600" y="1874519"/>
-            <a:ext cx="2377440" cy="365760"/>
-          </a:xfrm>
-          <a:prstGeom prst="rect">
-            <a:avLst/>
-          </a:prstGeom>
-          <a:noFill/>
-        </p:spPr>
-        <p:txBody>
-          <a:bodyPr wrap="square" lIns="0" rIns="0" tIns="0" bIns="0" anchor="t">
-            <a:spAutoFit/>
-          </a:bodyPr>
-          <a:lstStyle/>
-          <a:p>
-            <a:pPr algn="l">
-              <a:lnSpc>
-                <a:spcPct val="135000"/>
-              </a:lnSpc>
-              <a:spcAft>
-                <a:spcPts val="0"/>
-              </a:spcAft>
-            </a:pPr>
-            <a:r>
-              <a:rPr sz="1300" b="0" i="0">
-                <a:solidFill>
-                  <a:srgbClr val="514A3C"/>
-                </a:solidFill>
-                <a:latin typeface="Segoe UI"/>
-              </a:rPr>
-              <a:t>Escrow agent, today</a:t>
-            </a:r>
-          </a:p>
-        </p:txBody>
-      </p:sp>
-      <p:sp>
-        <p:nvSpPr>
-          <p:cNvPr id="8" name="TextBox 7"/>
-          <p:cNvSpPr txBox="1"/>
-          <p:nvPr/>
-        </p:nvSpPr>
-        <p:spPr>
-          <a:xfrm>
-            <a:off x="9464040" y="1874519"/>
-            <a:ext cx="1005840" cy="365760"/>
-          </a:xfrm>
-          <a:prstGeom prst="rect">
-            <a:avLst/>
-          </a:prstGeom>
-          <a:noFill/>
-        </p:spPr>
-        <p:txBody>
-          <a:bodyPr wrap="square" lIns="0" rIns="0" tIns="0" bIns="0" anchor="t">
-            <a:spAutoFit/>
-          </a:bodyPr>
-          <a:lstStyle/>
-          <a:p>
-            <a:pPr algn="r">
-              <a:lnSpc>
-                <a:spcPct val="135000"/>
-              </a:lnSpc>
-              <a:spcAft>
-                <a:spcPts val="0"/>
-              </a:spcAft>
-            </a:pPr>
-            <a:r>
-              <a:rPr sz="1300" b="0" i="0">
-                <a:solidFill>
-                  <a:srgbClr val="17130D"/>
-                </a:solidFill>
-                <a:latin typeface="Consolas"/>
-              </a:rPr>
-              <a:t>3–5%</a:t>
-            </a:r>
-          </a:p>
-        </p:txBody>
-      </p:sp>
-      <p:sp>
-        <p:nvSpPr>
-          <p:cNvPr id="9" name="TextBox 8"/>
-          <p:cNvSpPr txBox="1"/>
-          <p:nvPr/>
-        </p:nvSpPr>
-        <p:spPr>
-          <a:xfrm>
-            <a:off x="10515600" y="1901951"/>
-            <a:ext cx="868680" cy="365760"/>
-          </a:xfrm>
-          <a:prstGeom prst="rect">
-            <a:avLst/>
-          </a:prstGeom>
-          <a:noFill/>
-        </p:spPr>
-        <p:txBody>
-          <a:bodyPr wrap="square" lIns="0" rIns="0" tIns="0" bIns="0" anchor="t">
-            <a:spAutoFit/>
-          </a:bodyPr>
-          <a:lstStyle/>
-          <a:p>
-            <a:pPr algn="r">
-              <a:lnSpc>
-                <a:spcPct val="135000"/>
-              </a:lnSpc>
-              <a:spcAft>
-                <a:spcPts val="0"/>
-              </a:spcAft>
-            </a:pPr>
-            <a:r>
-              <a:rPr sz="1100" b="0" i="0">
-                <a:solidFill>
-                  <a:srgbClr val="8C8467"/>
-                </a:solidFill>
-                <a:latin typeface="Segoe UI"/>
-              </a:rPr>
-              <a:t>days</a:t>
-            </a:r>
-          </a:p>
-        </p:txBody>
-      </p:sp>
-      <p:sp>
-        <p:nvSpPr>
-          <p:cNvPr id="10" name="Rectangle 9"/>
-          <p:cNvSpPr/>
-          <p:nvPr/>
-        </p:nvSpPr>
-        <p:spPr>
-          <a:xfrm>
-            <a:off x="7086600" y="2295143"/>
-            <a:ext cx="4297680" cy="4762"/>
-          </a:xfrm>
-          <a:prstGeom prst="rect">
-            <a:avLst/>
-          </a:prstGeom>
-          <a:solidFill>
-            <a:srgbClr val="E8E2D4"/>
-          </a:solidFill>
-          <a:ln>
-            <a:noFill/>
-          </a:ln>
-          <a:effectLst/>
-        </p:spPr>
-        <p:style>
-          <a:lnRef idx="1">
-            <a:schemeClr val="accent1"/>
-          </a:lnRef>
-          <a:fillRef idx="3">
-            <a:schemeClr val="accent1"/>
-          </a:fillRef>
-          <a:effectRef idx="2">
-            <a:schemeClr val="accent1"/>
-          </a:effectRef>
-          <a:fontRef idx="minor">
-            <a:schemeClr val="lt1"/>
-          </a:fontRef>
-        </p:style>
-        <p:txBody>
-          <a:bodyPr rtlCol="0" anchor="ctr"/>
-          <a:lstStyle/>
-          <a:p>
-            <a:pPr algn="ctr"/>
-          </a:p>
-        </p:txBody>
-      </p:sp>
-      <p:sp>
-        <p:nvSpPr>
-          <p:cNvPr id="11" name="TextBox 10"/>
-          <p:cNvSpPr txBox="1"/>
-          <p:nvPr/>
-        </p:nvSpPr>
-        <p:spPr>
-          <a:xfrm>
-            <a:off x="7086600" y="2404871"/>
-            <a:ext cx="2377440" cy="365760"/>
-          </a:xfrm>
-          <a:prstGeom prst="rect">
-            <a:avLst/>
-          </a:prstGeom>
-          <a:noFill/>
-        </p:spPr>
-        <p:txBody>
-          <a:bodyPr wrap="square" lIns="0" rIns="0" tIns="0" bIns="0" anchor="t">
-            <a:spAutoFit/>
-          </a:bodyPr>
-          <a:lstStyle/>
-          <a:p>
-            <a:pPr algn="l">
-              <a:lnSpc>
-                <a:spcPct val="135000"/>
-              </a:lnSpc>
-              <a:spcAft>
-                <a:spcPts val="0"/>
-              </a:spcAft>
-            </a:pPr>
-            <a:r>
-              <a:rPr sz="1300" b="0" i="0">
-                <a:solidFill>
-                  <a:srgbClr val="514A3C"/>
-                </a:solidFill>
-                <a:latin typeface="Segoe UI"/>
-              </a:rPr>
-              <a:t>Kirim</a:t>
-            </a:r>
-          </a:p>
-        </p:txBody>
-      </p:sp>
-      <p:sp>
-        <p:nvSpPr>
-          <p:cNvPr id="12" name="TextBox 11"/>
-          <p:cNvSpPr txBox="1"/>
-          <p:nvPr/>
-        </p:nvSpPr>
-        <p:spPr>
-          <a:xfrm>
-            <a:off x="9464040" y="2404871"/>
-            <a:ext cx="1005840" cy="365760"/>
-          </a:xfrm>
-          <a:prstGeom prst="rect">
-            <a:avLst/>
-          </a:prstGeom>
-          <a:noFill/>
-        </p:spPr>
-        <p:txBody>
-          <a:bodyPr wrap="square" lIns="0" rIns="0" tIns="0" bIns="0" anchor="t">
-            <a:spAutoFit/>
-          </a:bodyPr>
-          <a:lstStyle/>
-          <a:p>
-            <a:pPr algn="r">
-              <a:lnSpc>
-                <a:spcPct val="135000"/>
-              </a:lnSpc>
-              <a:spcAft>
-                <a:spcPts val="0"/>
-              </a:spcAft>
-            </a:pPr>
-            <a:r>
-              <a:rPr sz="1300" b="0" i="0">
-                <a:solidFill>
-                  <a:srgbClr val="17130D"/>
-                </a:solidFill>
-                <a:latin typeface="Consolas"/>
-              </a:rPr>
-              <a:t>0.8%</a:t>
-            </a:r>
-          </a:p>
-        </p:txBody>
-      </p:sp>
-      <p:sp>
-        <p:nvSpPr>
-          <p:cNvPr id="13" name="TextBox 12"/>
-          <p:cNvSpPr txBox="1"/>
-          <p:nvPr/>
-        </p:nvSpPr>
-        <p:spPr>
-          <a:xfrm>
-            <a:off x="10515600" y="2432303"/>
-            <a:ext cx="868680" cy="365760"/>
-          </a:xfrm>
-          <a:prstGeom prst="rect">
-            <a:avLst/>
-          </a:prstGeom>
-          <a:noFill/>
-        </p:spPr>
-        <p:txBody>
-          <a:bodyPr wrap="square" lIns="0" rIns="0" tIns="0" bIns="0" anchor="t">
-            <a:spAutoFit/>
-          </a:bodyPr>
-          <a:lstStyle/>
-          <a:p>
-            <a:pPr algn="r">
-              <a:lnSpc>
-                <a:spcPct val="135000"/>
-              </a:lnSpc>
-              <a:spcAft>
-                <a:spcPts val="0"/>
-              </a:spcAft>
-            </a:pPr>
-            <a:r>
-              <a:rPr sz="1100" b="0" i="0">
-                <a:solidFill>
-                  <a:srgbClr val="8C8467"/>
-                </a:solidFill>
-                <a:latin typeface="Segoe UI"/>
-              </a:rPr>
-              <a:t>~4 seconds</a:t>
-            </a:r>
-          </a:p>
-        </p:txBody>
-      </p:sp>
-      <p:sp>
-        <p:nvSpPr>
-          <p:cNvPr id="14" name="Rectangle 13"/>
-          <p:cNvSpPr/>
-          <p:nvPr/>
-        </p:nvSpPr>
-        <p:spPr>
-          <a:xfrm>
-            <a:off x="7086600" y="2825495"/>
-            <a:ext cx="4297680" cy="4762"/>
-          </a:xfrm>
-          <a:prstGeom prst="rect">
-            <a:avLst/>
-          </a:prstGeom>
-          <a:solidFill>
-            <a:srgbClr val="E8E2D4"/>
-          </a:solidFill>
-          <a:ln>
-            <a:noFill/>
-          </a:ln>
-          <a:effectLst/>
-        </p:spPr>
-        <p:style>
-          <a:lnRef idx="1">
-            <a:schemeClr val="accent1"/>
-          </a:lnRef>
-          <a:fillRef idx="3">
-            <a:schemeClr val="accent1"/>
-          </a:fillRef>
-          <a:effectRef idx="2">
-            <a:schemeClr val="accent1"/>
-          </a:effectRef>
-          <a:fontRef idx="minor">
-            <a:schemeClr val="lt1"/>
-          </a:fontRef>
-        </p:style>
-        <p:txBody>
-          <a:bodyPr rtlCol="0" anchor="ctr"/>
-          <a:lstStyle/>
-          <a:p>
-            <a:pPr algn="ctr"/>
-          </a:p>
-        </p:txBody>
-      </p:sp>
-      <p:sp>
-        <p:nvSpPr>
-          <p:cNvPr id="15" name="TextBox 14"/>
-          <p:cNvSpPr txBox="1"/>
-          <p:nvPr/>
-        </p:nvSpPr>
-        <p:spPr>
-          <a:xfrm>
-            <a:off x="7086600" y="2935223"/>
-            <a:ext cx="2377440" cy="365760"/>
-          </a:xfrm>
-          <a:prstGeom prst="rect">
-            <a:avLst/>
-          </a:prstGeom>
-          <a:noFill/>
-        </p:spPr>
-        <p:txBody>
-          <a:bodyPr wrap="square" lIns="0" rIns="0" tIns="0" bIns="0" anchor="t">
-            <a:spAutoFit/>
-          </a:bodyPr>
-          <a:lstStyle/>
-          <a:p>
-            <a:pPr algn="l">
-              <a:lnSpc>
-                <a:spcPct val="135000"/>
-              </a:lnSpc>
-              <a:spcAft>
-                <a:spcPts val="0"/>
-              </a:spcAft>
-            </a:pPr>
-            <a:r>
-              <a:rPr sz="1300" b="0" i="0">
-                <a:solidFill>
-                  <a:srgbClr val="514A3C"/>
-                </a:solidFill>
-                <a:latin typeface="Segoe UI"/>
-              </a:rPr>
-              <a:t>Evidence checks</a:t>
-            </a:r>
-          </a:p>
-        </p:txBody>
-      </p:sp>
-      <p:sp>
-        <p:nvSpPr>
-          <p:cNvPr id="16" name="TextBox 15"/>
-          <p:cNvSpPr txBox="1"/>
-          <p:nvPr/>
-        </p:nvSpPr>
-        <p:spPr>
-          <a:xfrm>
-            <a:off x="9464040" y="2935223"/>
-            <a:ext cx="1005840" cy="365760"/>
-          </a:xfrm>
-          <a:prstGeom prst="rect">
-            <a:avLst/>
-          </a:prstGeom>
-          <a:noFill/>
-        </p:spPr>
-        <p:txBody>
-          <a:bodyPr wrap="square" lIns="0" rIns="0" tIns="0" bIns="0" anchor="t">
-            <a:spAutoFit/>
-          </a:bodyPr>
-          <a:lstStyle/>
-          <a:p>
-            <a:pPr algn="r">
-              <a:lnSpc>
-                <a:spcPct val="135000"/>
-              </a:lnSpc>
-              <a:spcAft>
-                <a:spcPts val="0"/>
-              </a:spcAft>
-            </a:pPr>
-            <a:r>
-              <a:rPr sz="1300" b="0" i="0">
-                <a:solidFill>
-                  <a:srgbClr val="17130D"/>
-                </a:solidFill>
-                <a:latin typeface="Consolas"/>
-              </a:rPr>
-              <a:t>US$0.48</a:t>
-            </a:r>
-          </a:p>
-        </p:txBody>
-      </p:sp>
-      <p:sp>
-        <p:nvSpPr>
-          <p:cNvPr id="17" name="TextBox 16"/>
-          <p:cNvSpPr txBox="1"/>
-          <p:nvPr/>
-        </p:nvSpPr>
-        <p:spPr>
-          <a:xfrm>
-            <a:off x="10515600" y="2962655"/>
-            <a:ext cx="868680" cy="365760"/>
-          </a:xfrm>
-          <a:prstGeom prst="rect">
-            <a:avLst/>
-          </a:prstGeom>
-          <a:noFill/>
-        </p:spPr>
-        <p:txBody>
-          <a:bodyPr wrap="square" lIns="0" rIns="0" tIns="0" bIns="0" anchor="t">
-            <a:spAutoFit/>
-          </a:bodyPr>
-          <a:lstStyle/>
-          <a:p>
-            <a:pPr algn="r">
-              <a:lnSpc>
-                <a:spcPct val="135000"/>
-              </a:lnSpc>
-              <a:spcAft>
-                <a:spcPts val="0"/>
-              </a:spcAft>
-            </a:pPr>
-            <a:r>
-              <a:rPr sz="1100" b="0" i="0">
-                <a:solidFill>
-                  <a:srgbClr val="8C8467"/>
-                </a:solidFill>
-                <a:latin typeface="Segoe UI"/>
-              </a:rPr>
-              <a:t>per milestone</a:t>
-            </a:r>
-          </a:p>
-        </p:txBody>
-      </p:sp>
-      <p:sp>
-        <p:nvSpPr>
-          <p:cNvPr id="18" name="Rectangle 17"/>
-          <p:cNvSpPr/>
-          <p:nvPr/>
-        </p:nvSpPr>
-        <p:spPr>
-          <a:xfrm>
-            <a:off x="7086600" y="3355847"/>
-            <a:ext cx="4297680" cy="4762"/>
-          </a:xfrm>
-          <a:prstGeom prst="rect">
-            <a:avLst/>
-          </a:prstGeom>
-          <a:solidFill>
-            <a:srgbClr val="E8E2D4"/>
-          </a:solidFill>
-          <a:ln>
-            <a:noFill/>
-          </a:ln>
-          <a:effectLst/>
-        </p:spPr>
-        <p:style>
-          <a:lnRef idx="1">
-            <a:schemeClr val="accent1"/>
-          </a:lnRef>
-          <a:fillRef idx="3">
-            <a:schemeClr val="accent1"/>
-          </a:fillRef>
-          <a:effectRef idx="2">
-            <a:schemeClr val="accent1"/>
-          </a:effectRef>
-          <a:fontRef idx="minor">
-            <a:schemeClr val="lt1"/>
-          </a:fontRef>
-        </p:style>
-        <p:txBody>
-          <a:bodyPr rtlCol="0" anchor="ctr"/>
-          <a:lstStyle/>
-          <a:p>
-            <a:pPr algn="ctr"/>
-          </a:p>
-        </p:txBody>
-      </p:sp>
-      <p:sp>
-        <p:nvSpPr>
-          <p:cNvPr id="19" name="TextBox 18"/>
-          <p:cNvSpPr txBox="1"/>
-          <p:nvPr/>
-        </p:nvSpPr>
-        <p:spPr>
-          <a:xfrm>
-            <a:off x="7086600" y="3465575"/>
-            <a:ext cx="2377440" cy="365760"/>
-          </a:xfrm>
-          <a:prstGeom prst="rect">
-            <a:avLst/>
-          </a:prstGeom>
-          <a:noFill/>
-        </p:spPr>
-        <p:txBody>
-          <a:bodyPr wrap="square" lIns="0" rIns="0" tIns="0" bIns="0" anchor="t">
-            <a:spAutoFit/>
-          </a:bodyPr>
-          <a:lstStyle/>
-          <a:p>
-            <a:pPr algn="l">
-              <a:lnSpc>
-                <a:spcPct val="135000"/>
-              </a:lnSpc>
-              <a:spcAft>
-                <a:spcPts val="0"/>
-              </a:spcAft>
-            </a:pPr>
-            <a:r>
-              <a:rPr sz="1300" b="0" i="0">
-                <a:solidFill>
-                  <a:srgbClr val="514A3C"/>
-                </a:solidFill>
-                <a:latin typeface="Segoe UI"/>
-              </a:rPr>
-              <a:t>On a S$50,000 renovation</a:t>
-            </a:r>
-          </a:p>
-        </p:txBody>
-      </p:sp>
-      <p:sp>
-        <p:nvSpPr>
-          <p:cNvPr id="20" name="TextBox 19"/>
-          <p:cNvSpPr txBox="1"/>
-          <p:nvPr/>
-        </p:nvSpPr>
-        <p:spPr>
-          <a:xfrm>
-            <a:off x="9464040" y="3465575"/>
-            <a:ext cx="1005840" cy="365760"/>
-          </a:xfrm>
-          <a:prstGeom prst="rect">
-            <a:avLst/>
-          </a:prstGeom>
-          <a:noFill/>
-        </p:spPr>
-        <p:txBody>
-          <a:bodyPr wrap="square" lIns="0" rIns="0" tIns="0" bIns="0" anchor="t">
-            <a:spAutoFit/>
-          </a:bodyPr>
-          <a:lstStyle/>
-          <a:p>
-            <a:pPr algn="r">
-              <a:lnSpc>
-                <a:spcPct val="135000"/>
-              </a:lnSpc>
-              <a:spcAft>
-                <a:spcPts val="0"/>
-              </a:spcAft>
-            </a:pPr>
-            <a:r>
-              <a:rPr sz="1300" b="0" i="0">
-                <a:solidFill>
-                  <a:srgbClr val="17130D"/>
-                </a:solidFill>
-                <a:latin typeface="Consolas"/>
-              </a:rPr>
-              <a:t>S$400</a:t>
-            </a:r>
-          </a:p>
-        </p:txBody>
-      </p:sp>
-      <p:sp>
-        <p:nvSpPr>
-          <p:cNvPr id="21" name="TextBox 20"/>
-          <p:cNvSpPr txBox="1"/>
-          <p:nvPr/>
-        </p:nvSpPr>
-        <p:spPr>
-          <a:xfrm>
-            <a:off x="10515600" y="3493007"/>
-            <a:ext cx="868680" cy="365760"/>
-          </a:xfrm>
-          <a:prstGeom prst="rect">
-            <a:avLst/>
-          </a:prstGeom>
-          <a:noFill/>
-        </p:spPr>
-        <p:txBody>
-          <a:bodyPr wrap="square" lIns="0" rIns="0" tIns="0" bIns="0" anchor="t">
-            <a:spAutoFit/>
-          </a:bodyPr>
-          <a:lstStyle/>
-          <a:p>
-            <a:pPr algn="r">
-              <a:lnSpc>
-                <a:spcPct val="135000"/>
-              </a:lnSpc>
-              <a:spcAft>
-                <a:spcPts val="0"/>
-              </a:spcAft>
-            </a:pPr>
-            <a:r>
-              <a:rPr sz="1100" b="0" i="0">
-                <a:solidFill>
-                  <a:srgbClr val="8C8467"/>
-                </a:solidFill>
-                <a:latin typeface="Segoe UI"/>
-              </a:rPr>
-              <a:t>total fee</a:t>
-            </a:r>
-          </a:p>
-        </p:txBody>
-      </p:sp>
-      <p:sp>
-        <p:nvSpPr>
-          <p:cNvPr id="22" name="Rectangle 21"/>
-          <p:cNvSpPr/>
-          <p:nvPr/>
-        </p:nvSpPr>
-        <p:spPr>
-          <a:xfrm>
-            <a:off x="7086600" y="3886199"/>
-            <a:ext cx="4297680" cy="4762"/>
-          </a:xfrm>
-          <a:prstGeom prst="rect">
-            <a:avLst/>
-          </a:prstGeom>
-          <a:solidFill>
-            <a:srgbClr val="E8E2D4"/>
-          </a:solidFill>
-          <a:ln>
-            <a:noFill/>
-          </a:ln>
-          <a:effectLst/>
-        </p:spPr>
-        <p:style>
-          <a:lnRef idx="1">
-            <a:schemeClr val="accent1"/>
-          </a:lnRef>
-          <a:fillRef idx="3">
-            <a:schemeClr val="accent1"/>
-          </a:fillRef>
-          <a:effectRef idx="2">
-            <a:schemeClr val="accent1"/>
-          </a:effectRef>
-          <a:fontRef idx="minor">
-            <a:schemeClr val="lt1"/>
-          </a:fontRef>
-        </p:style>
-        <p:txBody>
-          <a:bodyPr rtlCol="0" anchor="ctr"/>
-          <a:lstStyle/>
-          <a:p>
-            <a:pPr algn="ctr"/>
-          </a:p>
-        </p:txBody>
-      </p:sp>
-      <p:sp>
-        <p:nvSpPr>
-          <p:cNvPr id="23" name="Rectangle 22"/>
-          <p:cNvSpPr/>
-          <p:nvPr/>
-        </p:nvSpPr>
-        <p:spPr>
-          <a:xfrm>
-            <a:off x="777240" y="6199632"/>
-            <a:ext cx="10637215" cy="4762"/>
-          </a:xfrm>
-          <a:prstGeom prst="rect">
-            <a:avLst/>
-          </a:prstGeom>
-          <a:solidFill>
-            <a:srgbClr val="DED7C6"/>
-          </a:solidFill>
-          <a:ln>
-            <a:noFill/>
-          </a:ln>
-          <a:effectLst/>
-        </p:spPr>
-        <p:style>
-          <a:lnRef idx="1">
-            <a:schemeClr val="accent1"/>
-          </a:lnRef>
-          <a:fillRef idx="3">
-            <a:schemeClr val="accent1"/>
-          </a:fillRef>
-          <a:effectRef idx="2">
-            <a:schemeClr val="accent1"/>
-          </a:effectRef>
-          <a:fontRef idx="minor">
-            <a:schemeClr val="lt1"/>
-          </a:fontRef>
-        </p:style>
-        <p:txBody>
-          <a:bodyPr rtlCol="0" anchor="ctr"/>
-          <a:lstStyle/>
-          <a:p>
-            <a:pPr algn="ctr"/>
-          </a:p>
-        </p:txBody>
-      </p:sp>
-      <p:sp>
-        <p:nvSpPr>
-          <p:cNvPr id="24" name="TextBox 23"/>
+          <p:cNvPr id="27" name="TextBox 26"/>
           <p:cNvSpPr txBox="1"/>
           <p:nvPr/>
         </p:nvSpPr>
@@ -8268,18 +8699,18 @@
             <a:r>
               <a:rPr sz="950" b="0" i="0" spc="12">
                 <a:solidFill>
-                  <a:srgbClr val="8C8467"/>
+                  <a:srgbClr val="7D766A"/>
                 </a:solidFill>
                 <a:latin typeface="Consolas"/>
               </a:rPr>
-              <a:t>KIRIM</a:t>
-            </a:r>
-          </a:p>
-        </p:txBody>
-      </p:sp>
-      <p:sp>
-        <p:nvSpPr>
-          <p:cNvPr id="25" name="TextBox 24"/>
+              <a:t>KIRIM  ·  XRPL TESTNET</a:t>
+            </a:r>
+          </a:p>
+        </p:txBody>
+      </p:sp>
+      <p:sp>
+        <p:nvSpPr>
+          <p:cNvPr id="28" name="TextBox 27"/>
           <p:cNvSpPr txBox="1"/>
           <p:nvPr/>
         </p:nvSpPr>
@@ -8310,11 +8741,11 @@
             <a:r>
               <a:rPr sz="950" b="0" i="0" spc="12">
                 <a:solidFill>
-                  <a:srgbClr val="8C8467"/>
+                  <a:srgbClr val="7D766A"/>
                 </a:solidFill>
                 <a:latin typeface="Consolas"/>
               </a:rPr>
-              <a:t>12 / BUSINESS</a:t>
+              <a:t>12 / PROOF</a:t>
             </a:r>
           </a:p>
         </p:txBody>
@@ -8328,6 +8759,1065 @@
 </file>
 
 <file path=ppt/slides/slide14.xml><?xml version="1.0" encoding="utf-8"?>
+<p:sld xmlns:a="http://schemas.openxmlformats.org/drawingml/2006/main" xmlns:p="http://schemas.openxmlformats.org/presentationml/2006/main" xmlns:r="http://schemas.openxmlformats.org/officeDocument/2006/relationships">
+  <p:cSld>
+    <p:spTree>
+      <p:nvGrpSpPr>
+        <p:cNvPr id="1" name=""/>
+        <p:cNvGrpSpPr/>
+        <p:nvPr/>
+      </p:nvGrpSpPr>
+      <p:grpSpPr/>
+      <p:sp>
+        <p:nvSpPr>
+          <p:cNvPr id="2" name="Rectangle 1"/>
+          <p:cNvSpPr/>
+          <p:nvPr/>
+        </p:nvSpPr>
+        <p:spPr>
+          <a:xfrm>
+            <a:off x="0" y="0"/>
+            <a:ext cx="12191695" cy="6858000"/>
+          </a:xfrm>
+          <a:prstGeom prst="rect">
+            <a:avLst/>
+          </a:prstGeom>
+          <a:solidFill>
+            <a:srgbClr val="F1ECE1"/>
+          </a:solidFill>
+          <a:ln>
+            <a:noFill/>
+          </a:ln>
+          <a:effectLst/>
+        </p:spPr>
+        <p:style>
+          <a:lnRef idx="1">
+            <a:schemeClr val="accent1"/>
+          </a:lnRef>
+          <a:fillRef idx="3">
+            <a:schemeClr val="accent1"/>
+          </a:fillRef>
+          <a:effectRef idx="2">
+            <a:schemeClr val="accent1"/>
+          </a:effectRef>
+          <a:fontRef idx="minor">
+            <a:schemeClr val="lt1"/>
+          </a:fontRef>
+        </p:style>
+        <p:txBody>
+          <a:bodyPr rtlCol="0" anchor="ctr" wrap="square"/>
+          <a:lstStyle/>
+          <a:p>
+            <a:pPr algn="ctr"/>
+          </a:p>
+        </p:txBody>
+      </p:sp>
+      <p:sp>
+        <p:nvSpPr>
+          <p:cNvPr id="3" name="TextBox 2"/>
+          <p:cNvSpPr txBox="1"/>
+          <p:nvPr/>
+        </p:nvSpPr>
+        <p:spPr>
+          <a:xfrm>
+            <a:off x="777240" y="566928"/>
+            <a:ext cx="10637215" cy="228600"/>
+          </a:xfrm>
+          <a:prstGeom prst="rect">
+            <a:avLst/>
+          </a:prstGeom>
+          <a:noFill/>
+        </p:spPr>
+        <p:txBody>
+          <a:bodyPr wrap="square" lIns="0" rIns="0" tIns="0" bIns="0" anchor="t">
+            <a:spAutoFit/>
+          </a:bodyPr>
+          <a:lstStyle/>
+          <a:p>
+            <a:pPr algn="l">
+              <a:lnSpc>
+                <a:spcPct val="135000"/>
+              </a:lnSpc>
+              <a:spcAft>
+                <a:spcPts val="0"/>
+              </a:spcAft>
+            </a:pPr>
+            <a:r>
+              <a:rPr sz="1050" b="0" i="0" spc="18">
+                <a:solidFill>
+                  <a:srgbClr val="8C8467"/>
+                </a:solidFill>
+                <a:latin typeface="Consolas"/>
+              </a:rPr>
+              <a:t>THE BUSINESS</a:t>
+            </a:r>
+          </a:p>
+        </p:txBody>
+      </p:sp>
+      <p:sp>
+        <p:nvSpPr>
+          <p:cNvPr id="4" name="TextBox 3"/>
+          <p:cNvSpPr txBox="1"/>
+          <p:nvPr/>
+        </p:nvSpPr>
+        <p:spPr>
+          <a:xfrm>
+            <a:off x="777240" y="868680"/>
+            <a:ext cx="10637215" cy="1188720"/>
+          </a:xfrm>
+          <a:prstGeom prst="rect">
+            <a:avLst/>
+          </a:prstGeom>
+          <a:noFill/>
+        </p:spPr>
+        <p:txBody>
+          <a:bodyPr wrap="square" lIns="0" rIns="0" tIns="0" bIns="0" anchor="t">
+            <a:spAutoFit/>
+          </a:bodyPr>
+          <a:lstStyle/>
+          <a:p>
+            <a:pPr algn="l">
+              <a:lnSpc>
+                <a:spcPct val="106000"/>
+              </a:lnSpc>
+              <a:spcAft>
+                <a:spcPts val="0"/>
+              </a:spcAft>
+            </a:pPr>
+            <a:r>
+              <a:rPr sz="3200" b="0" i="0">
+                <a:solidFill>
+                  <a:srgbClr val="17130D"/>
+                </a:solidFill>
+                <a:latin typeface="Georgia"/>
+              </a:rPr>
+              <a:t>We charge for the release, because that is where the risk is.</a:t>
+            </a:r>
+          </a:p>
+        </p:txBody>
+      </p:sp>
+      <p:sp>
+        <p:nvSpPr>
+          <p:cNvPr id="5" name="TextBox 4"/>
+          <p:cNvSpPr txBox="1"/>
+          <p:nvPr/>
+        </p:nvSpPr>
+        <p:spPr>
+          <a:xfrm>
+            <a:off x="777240" y="1965960"/>
+            <a:ext cx="5486400" cy="2194560"/>
+          </a:xfrm>
+          <a:prstGeom prst="rect">
+            <a:avLst/>
+          </a:prstGeom>
+          <a:noFill/>
+        </p:spPr>
+        <p:txBody>
+          <a:bodyPr wrap="square" lIns="0" rIns="0" tIns="0" bIns="0" anchor="t">
+            <a:spAutoFit/>
+          </a:bodyPr>
+          <a:lstStyle/>
+          <a:p>
+            <a:pPr algn="l">
+              <a:lnSpc>
+                <a:spcPct val="155000"/>
+              </a:lnSpc>
+              <a:spcAft>
+                <a:spcPts val="1600"/>
+              </a:spcAft>
+            </a:pPr>
+            <a:r>
+              <a:rPr sz="1550" b="0" i="0">
+                <a:solidFill>
+                  <a:srgbClr val="514A3C"/>
+                </a:solidFill>
+                <a:latin typeface="Segoe UI"/>
+              </a:rPr>
+              <a:t>Kirim takes 0.8% of each released milestone, paid by the client at the moment of release. A licensed escrow agent charges 3–5% and takes days; a lawyer's stakeholder account costs more than the milestone.</a:t>
+            </a:r>
+          </a:p>
+          <a:p>
+            <a:pPr>
+              <a:lnSpc>
+                <a:spcPct val="155000"/>
+              </a:lnSpc>
+              <a:spcAft>
+                <a:spcPts val="0"/>
+              </a:spcAft>
+            </a:pPr>
+            <a:r>
+              <a:rPr sz="1550" b="0" i="0">
+                <a:solidFill>
+                  <a:srgbClr val="514A3C"/>
+                </a:solidFill>
+                <a:latin typeface="Segoe UI"/>
+              </a:rPr>
+              <a:t>The evidence checks are bought per milestone at cents apiece, so the cost of assurance no longer scales with a site visit.</a:t>
+            </a:r>
+          </a:p>
+        </p:txBody>
+      </p:sp>
+      <p:sp>
+        <p:nvSpPr>
+          <p:cNvPr id="6" name="Rectangle 5"/>
+          <p:cNvSpPr/>
+          <p:nvPr/>
+        </p:nvSpPr>
+        <p:spPr>
+          <a:xfrm>
+            <a:off x="7086600" y="1764791"/>
+            <a:ext cx="4297680" cy="4762"/>
+          </a:xfrm>
+          <a:prstGeom prst="rect">
+            <a:avLst/>
+          </a:prstGeom>
+          <a:solidFill>
+            <a:srgbClr val="DED7C6"/>
+          </a:solidFill>
+          <a:ln>
+            <a:noFill/>
+          </a:ln>
+          <a:effectLst/>
+        </p:spPr>
+        <p:style>
+          <a:lnRef idx="1">
+            <a:schemeClr val="accent1"/>
+          </a:lnRef>
+          <a:fillRef idx="3">
+            <a:schemeClr val="accent1"/>
+          </a:fillRef>
+          <a:effectRef idx="2">
+            <a:schemeClr val="accent1"/>
+          </a:effectRef>
+          <a:fontRef idx="minor">
+            <a:schemeClr val="lt1"/>
+          </a:fontRef>
+        </p:style>
+        <p:txBody>
+          <a:bodyPr rtlCol="0" anchor="ctr"/>
+          <a:lstStyle/>
+          <a:p>
+            <a:pPr algn="ctr"/>
+          </a:p>
+        </p:txBody>
+      </p:sp>
+      <p:sp>
+        <p:nvSpPr>
+          <p:cNvPr id="7" name="TextBox 6"/>
+          <p:cNvSpPr txBox="1"/>
+          <p:nvPr/>
+        </p:nvSpPr>
+        <p:spPr>
+          <a:xfrm>
+            <a:off x="7086600" y="1874519"/>
+            <a:ext cx="2377440" cy="365760"/>
+          </a:xfrm>
+          <a:prstGeom prst="rect">
+            <a:avLst/>
+          </a:prstGeom>
+          <a:noFill/>
+        </p:spPr>
+        <p:txBody>
+          <a:bodyPr wrap="square" lIns="0" rIns="0" tIns="0" bIns="0" anchor="t">
+            <a:spAutoFit/>
+          </a:bodyPr>
+          <a:lstStyle/>
+          <a:p>
+            <a:pPr algn="l">
+              <a:lnSpc>
+                <a:spcPct val="135000"/>
+              </a:lnSpc>
+              <a:spcAft>
+                <a:spcPts val="0"/>
+              </a:spcAft>
+            </a:pPr>
+            <a:r>
+              <a:rPr sz="1300" b="0" i="0">
+                <a:solidFill>
+                  <a:srgbClr val="514A3C"/>
+                </a:solidFill>
+                <a:latin typeface="Segoe UI"/>
+              </a:rPr>
+              <a:t>Escrow agent, today</a:t>
+            </a:r>
+          </a:p>
+        </p:txBody>
+      </p:sp>
+      <p:sp>
+        <p:nvSpPr>
+          <p:cNvPr id="8" name="TextBox 7"/>
+          <p:cNvSpPr txBox="1"/>
+          <p:nvPr/>
+        </p:nvSpPr>
+        <p:spPr>
+          <a:xfrm>
+            <a:off x="9464040" y="1874519"/>
+            <a:ext cx="1005840" cy="365760"/>
+          </a:xfrm>
+          <a:prstGeom prst="rect">
+            <a:avLst/>
+          </a:prstGeom>
+          <a:noFill/>
+        </p:spPr>
+        <p:txBody>
+          <a:bodyPr wrap="square" lIns="0" rIns="0" tIns="0" bIns="0" anchor="t">
+            <a:spAutoFit/>
+          </a:bodyPr>
+          <a:lstStyle/>
+          <a:p>
+            <a:pPr algn="r">
+              <a:lnSpc>
+                <a:spcPct val="135000"/>
+              </a:lnSpc>
+              <a:spcAft>
+                <a:spcPts val="0"/>
+              </a:spcAft>
+            </a:pPr>
+            <a:r>
+              <a:rPr sz="1300" b="0" i="0">
+                <a:solidFill>
+                  <a:srgbClr val="17130D"/>
+                </a:solidFill>
+                <a:latin typeface="Consolas"/>
+              </a:rPr>
+              <a:t>3–5%</a:t>
+            </a:r>
+          </a:p>
+        </p:txBody>
+      </p:sp>
+      <p:sp>
+        <p:nvSpPr>
+          <p:cNvPr id="9" name="TextBox 8"/>
+          <p:cNvSpPr txBox="1"/>
+          <p:nvPr/>
+        </p:nvSpPr>
+        <p:spPr>
+          <a:xfrm>
+            <a:off x="10515600" y="1901951"/>
+            <a:ext cx="868680" cy="365760"/>
+          </a:xfrm>
+          <a:prstGeom prst="rect">
+            <a:avLst/>
+          </a:prstGeom>
+          <a:noFill/>
+        </p:spPr>
+        <p:txBody>
+          <a:bodyPr wrap="square" lIns="0" rIns="0" tIns="0" bIns="0" anchor="t">
+            <a:spAutoFit/>
+          </a:bodyPr>
+          <a:lstStyle/>
+          <a:p>
+            <a:pPr algn="r">
+              <a:lnSpc>
+                <a:spcPct val="135000"/>
+              </a:lnSpc>
+              <a:spcAft>
+                <a:spcPts val="0"/>
+              </a:spcAft>
+            </a:pPr>
+            <a:r>
+              <a:rPr sz="1100" b="0" i="0">
+                <a:solidFill>
+                  <a:srgbClr val="8C8467"/>
+                </a:solidFill>
+                <a:latin typeface="Segoe UI"/>
+              </a:rPr>
+              <a:t>days</a:t>
+            </a:r>
+          </a:p>
+        </p:txBody>
+      </p:sp>
+      <p:sp>
+        <p:nvSpPr>
+          <p:cNvPr id="10" name="Rectangle 9"/>
+          <p:cNvSpPr/>
+          <p:nvPr/>
+        </p:nvSpPr>
+        <p:spPr>
+          <a:xfrm>
+            <a:off x="7086600" y="2295143"/>
+            <a:ext cx="4297680" cy="4762"/>
+          </a:xfrm>
+          <a:prstGeom prst="rect">
+            <a:avLst/>
+          </a:prstGeom>
+          <a:solidFill>
+            <a:srgbClr val="E8E2D4"/>
+          </a:solidFill>
+          <a:ln>
+            <a:noFill/>
+          </a:ln>
+          <a:effectLst/>
+        </p:spPr>
+        <p:style>
+          <a:lnRef idx="1">
+            <a:schemeClr val="accent1"/>
+          </a:lnRef>
+          <a:fillRef idx="3">
+            <a:schemeClr val="accent1"/>
+          </a:fillRef>
+          <a:effectRef idx="2">
+            <a:schemeClr val="accent1"/>
+          </a:effectRef>
+          <a:fontRef idx="minor">
+            <a:schemeClr val="lt1"/>
+          </a:fontRef>
+        </p:style>
+        <p:txBody>
+          <a:bodyPr rtlCol="0" anchor="ctr"/>
+          <a:lstStyle/>
+          <a:p>
+            <a:pPr algn="ctr"/>
+          </a:p>
+        </p:txBody>
+      </p:sp>
+      <p:sp>
+        <p:nvSpPr>
+          <p:cNvPr id="11" name="TextBox 10"/>
+          <p:cNvSpPr txBox="1"/>
+          <p:nvPr/>
+        </p:nvSpPr>
+        <p:spPr>
+          <a:xfrm>
+            <a:off x="7086600" y="2404871"/>
+            <a:ext cx="2377440" cy="365760"/>
+          </a:xfrm>
+          <a:prstGeom prst="rect">
+            <a:avLst/>
+          </a:prstGeom>
+          <a:noFill/>
+        </p:spPr>
+        <p:txBody>
+          <a:bodyPr wrap="square" lIns="0" rIns="0" tIns="0" bIns="0" anchor="t">
+            <a:spAutoFit/>
+          </a:bodyPr>
+          <a:lstStyle/>
+          <a:p>
+            <a:pPr algn="l">
+              <a:lnSpc>
+                <a:spcPct val="135000"/>
+              </a:lnSpc>
+              <a:spcAft>
+                <a:spcPts val="0"/>
+              </a:spcAft>
+            </a:pPr>
+            <a:r>
+              <a:rPr sz="1300" b="0" i="0">
+                <a:solidFill>
+                  <a:srgbClr val="514A3C"/>
+                </a:solidFill>
+                <a:latin typeface="Segoe UI"/>
+              </a:rPr>
+              <a:t>Kirim</a:t>
+            </a:r>
+          </a:p>
+        </p:txBody>
+      </p:sp>
+      <p:sp>
+        <p:nvSpPr>
+          <p:cNvPr id="12" name="TextBox 11"/>
+          <p:cNvSpPr txBox="1"/>
+          <p:nvPr/>
+        </p:nvSpPr>
+        <p:spPr>
+          <a:xfrm>
+            <a:off x="9464040" y="2404871"/>
+            <a:ext cx="1005840" cy="365760"/>
+          </a:xfrm>
+          <a:prstGeom prst="rect">
+            <a:avLst/>
+          </a:prstGeom>
+          <a:noFill/>
+        </p:spPr>
+        <p:txBody>
+          <a:bodyPr wrap="square" lIns="0" rIns="0" tIns="0" bIns="0" anchor="t">
+            <a:spAutoFit/>
+          </a:bodyPr>
+          <a:lstStyle/>
+          <a:p>
+            <a:pPr algn="r">
+              <a:lnSpc>
+                <a:spcPct val="135000"/>
+              </a:lnSpc>
+              <a:spcAft>
+                <a:spcPts val="0"/>
+              </a:spcAft>
+            </a:pPr>
+            <a:r>
+              <a:rPr sz="1300" b="0" i="0">
+                <a:solidFill>
+                  <a:srgbClr val="17130D"/>
+                </a:solidFill>
+                <a:latin typeface="Consolas"/>
+              </a:rPr>
+              <a:t>0.8%</a:t>
+            </a:r>
+          </a:p>
+        </p:txBody>
+      </p:sp>
+      <p:sp>
+        <p:nvSpPr>
+          <p:cNvPr id="13" name="TextBox 12"/>
+          <p:cNvSpPr txBox="1"/>
+          <p:nvPr/>
+        </p:nvSpPr>
+        <p:spPr>
+          <a:xfrm>
+            <a:off x="10515600" y="2432303"/>
+            <a:ext cx="868680" cy="365760"/>
+          </a:xfrm>
+          <a:prstGeom prst="rect">
+            <a:avLst/>
+          </a:prstGeom>
+          <a:noFill/>
+        </p:spPr>
+        <p:txBody>
+          <a:bodyPr wrap="square" lIns="0" rIns="0" tIns="0" bIns="0" anchor="t">
+            <a:spAutoFit/>
+          </a:bodyPr>
+          <a:lstStyle/>
+          <a:p>
+            <a:pPr algn="r">
+              <a:lnSpc>
+                <a:spcPct val="135000"/>
+              </a:lnSpc>
+              <a:spcAft>
+                <a:spcPts val="0"/>
+              </a:spcAft>
+            </a:pPr>
+            <a:r>
+              <a:rPr sz="1100" b="0" i="0">
+                <a:solidFill>
+                  <a:srgbClr val="8C8467"/>
+                </a:solidFill>
+                <a:latin typeface="Segoe UI"/>
+              </a:rPr>
+              <a:t>~4 seconds</a:t>
+            </a:r>
+          </a:p>
+        </p:txBody>
+      </p:sp>
+      <p:sp>
+        <p:nvSpPr>
+          <p:cNvPr id="14" name="Rectangle 13"/>
+          <p:cNvSpPr/>
+          <p:nvPr/>
+        </p:nvSpPr>
+        <p:spPr>
+          <a:xfrm>
+            <a:off x="7086600" y="2825495"/>
+            <a:ext cx="4297680" cy="4762"/>
+          </a:xfrm>
+          <a:prstGeom prst="rect">
+            <a:avLst/>
+          </a:prstGeom>
+          <a:solidFill>
+            <a:srgbClr val="E8E2D4"/>
+          </a:solidFill>
+          <a:ln>
+            <a:noFill/>
+          </a:ln>
+          <a:effectLst/>
+        </p:spPr>
+        <p:style>
+          <a:lnRef idx="1">
+            <a:schemeClr val="accent1"/>
+          </a:lnRef>
+          <a:fillRef idx="3">
+            <a:schemeClr val="accent1"/>
+          </a:fillRef>
+          <a:effectRef idx="2">
+            <a:schemeClr val="accent1"/>
+          </a:effectRef>
+          <a:fontRef idx="minor">
+            <a:schemeClr val="lt1"/>
+          </a:fontRef>
+        </p:style>
+        <p:txBody>
+          <a:bodyPr rtlCol="0" anchor="ctr"/>
+          <a:lstStyle/>
+          <a:p>
+            <a:pPr algn="ctr"/>
+          </a:p>
+        </p:txBody>
+      </p:sp>
+      <p:sp>
+        <p:nvSpPr>
+          <p:cNvPr id="15" name="TextBox 14"/>
+          <p:cNvSpPr txBox="1"/>
+          <p:nvPr/>
+        </p:nvSpPr>
+        <p:spPr>
+          <a:xfrm>
+            <a:off x="7086600" y="2935223"/>
+            <a:ext cx="2377440" cy="365760"/>
+          </a:xfrm>
+          <a:prstGeom prst="rect">
+            <a:avLst/>
+          </a:prstGeom>
+          <a:noFill/>
+        </p:spPr>
+        <p:txBody>
+          <a:bodyPr wrap="square" lIns="0" rIns="0" tIns="0" bIns="0" anchor="t">
+            <a:spAutoFit/>
+          </a:bodyPr>
+          <a:lstStyle/>
+          <a:p>
+            <a:pPr algn="l">
+              <a:lnSpc>
+                <a:spcPct val="135000"/>
+              </a:lnSpc>
+              <a:spcAft>
+                <a:spcPts val="0"/>
+              </a:spcAft>
+            </a:pPr>
+            <a:r>
+              <a:rPr sz="1300" b="0" i="0">
+                <a:solidFill>
+                  <a:srgbClr val="514A3C"/>
+                </a:solidFill>
+                <a:latin typeface="Segoe UI"/>
+              </a:rPr>
+              <a:t>Evidence checks</a:t>
+            </a:r>
+          </a:p>
+        </p:txBody>
+      </p:sp>
+      <p:sp>
+        <p:nvSpPr>
+          <p:cNvPr id="16" name="TextBox 15"/>
+          <p:cNvSpPr txBox="1"/>
+          <p:nvPr/>
+        </p:nvSpPr>
+        <p:spPr>
+          <a:xfrm>
+            <a:off x="9464040" y="2935223"/>
+            <a:ext cx="1005840" cy="365760"/>
+          </a:xfrm>
+          <a:prstGeom prst="rect">
+            <a:avLst/>
+          </a:prstGeom>
+          <a:noFill/>
+        </p:spPr>
+        <p:txBody>
+          <a:bodyPr wrap="square" lIns="0" rIns="0" tIns="0" bIns="0" anchor="t">
+            <a:spAutoFit/>
+          </a:bodyPr>
+          <a:lstStyle/>
+          <a:p>
+            <a:pPr algn="r">
+              <a:lnSpc>
+                <a:spcPct val="135000"/>
+              </a:lnSpc>
+              <a:spcAft>
+                <a:spcPts val="0"/>
+              </a:spcAft>
+            </a:pPr>
+            <a:r>
+              <a:rPr sz="1300" b="0" i="0">
+                <a:solidFill>
+                  <a:srgbClr val="17130D"/>
+                </a:solidFill>
+                <a:latin typeface="Consolas"/>
+              </a:rPr>
+              <a:t>US$0.48</a:t>
+            </a:r>
+          </a:p>
+        </p:txBody>
+      </p:sp>
+      <p:sp>
+        <p:nvSpPr>
+          <p:cNvPr id="17" name="TextBox 16"/>
+          <p:cNvSpPr txBox="1"/>
+          <p:nvPr/>
+        </p:nvSpPr>
+        <p:spPr>
+          <a:xfrm>
+            <a:off x="10515600" y="2962655"/>
+            <a:ext cx="868680" cy="365760"/>
+          </a:xfrm>
+          <a:prstGeom prst="rect">
+            <a:avLst/>
+          </a:prstGeom>
+          <a:noFill/>
+        </p:spPr>
+        <p:txBody>
+          <a:bodyPr wrap="square" lIns="0" rIns="0" tIns="0" bIns="0" anchor="t">
+            <a:spAutoFit/>
+          </a:bodyPr>
+          <a:lstStyle/>
+          <a:p>
+            <a:pPr algn="r">
+              <a:lnSpc>
+                <a:spcPct val="135000"/>
+              </a:lnSpc>
+              <a:spcAft>
+                <a:spcPts val="0"/>
+              </a:spcAft>
+            </a:pPr>
+            <a:r>
+              <a:rPr sz="1100" b="0" i="0">
+                <a:solidFill>
+                  <a:srgbClr val="8C8467"/>
+                </a:solidFill>
+                <a:latin typeface="Segoe UI"/>
+              </a:rPr>
+              <a:t>per milestone</a:t>
+            </a:r>
+          </a:p>
+        </p:txBody>
+      </p:sp>
+      <p:sp>
+        <p:nvSpPr>
+          <p:cNvPr id="18" name="Rectangle 17"/>
+          <p:cNvSpPr/>
+          <p:nvPr/>
+        </p:nvSpPr>
+        <p:spPr>
+          <a:xfrm>
+            <a:off x="7086600" y="3355847"/>
+            <a:ext cx="4297680" cy="4762"/>
+          </a:xfrm>
+          <a:prstGeom prst="rect">
+            <a:avLst/>
+          </a:prstGeom>
+          <a:solidFill>
+            <a:srgbClr val="E8E2D4"/>
+          </a:solidFill>
+          <a:ln>
+            <a:noFill/>
+          </a:ln>
+          <a:effectLst/>
+        </p:spPr>
+        <p:style>
+          <a:lnRef idx="1">
+            <a:schemeClr val="accent1"/>
+          </a:lnRef>
+          <a:fillRef idx="3">
+            <a:schemeClr val="accent1"/>
+          </a:fillRef>
+          <a:effectRef idx="2">
+            <a:schemeClr val="accent1"/>
+          </a:effectRef>
+          <a:fontRef idx="minor">
+            <a:schemeClr val="lt1"/>
+          </a:fontRef>
+        </p:style>
+        <p:txBody>
+          <a:bodyPr rtlCol="0" anchor="ctr"/>
+          <a:lstStyle/>
+          <a:p>
+            <a:pPr algn="ctr"/>
+          </a:p>
+        </p:txBody>
+      </p:sp>
+      <p:sp>
+        <p:nvSpPr>
+          <p:cNvPr id="19" name="TextBox 18"/>
+          <p:cNvSpPr txBox="1"/>
+          <p:nvPr/>
+        </p:nvSpPr>
+        <p:spPr>
+          <a:xfrm>
+            <a:off x="7086600" y="3465575"/>
+            <a:ext cx="2377440" cy="365760"/>
+          </a:xfrm>
+          <a:prstGeom prst="rect">
+            <a:avLst/>
+          </a:prstGeom>
+          <a:noFill/>
+        </p:spPr>
+        <p:txBody>
+          <a:bodyPr wrap="square" lIns="0" rIns="0" tIns="0" bIns="0" anchor="t">
+            <a:spAutoFit/>
+          </a:bodyPr>
+          <a:lstStyle/>
+          <a:p>
+            <a:pPr algn="l">
+              <a:lnSpc>
+                <a:spcPct val="135000"/>
+              </a:lnSpc>
+              <a:spcAft>
+                <a:spcPts val="0"/>
+              </a:spcAft>
+            </a:pPr>
+            <a:r>
+              <a:rPr sz="1300" b="0" i="0">
+                <a:solidFill>
+                  <a:srgbClr val="514A3C"/>
+                </a:solidFill>
+                <a:latin typeface="Segoe UI"/>
+              </a:rPr>
+              <a:t>On a S$50,000 renovation</a:t>
+            </a:r>
+          </a:p>
+        </p:txBody>
+      </p:sp>
+      <p:sp>
+        <p:nvSpPr>
+          <p:cNvPr id="20" name="TextBox 19"/>
+          <p:cNvSpPr txBox="1"/>
+          <p:nvPr/>
+        </p:nvSpPr>
+        <p:spPr>
+          <a:xfrm>
+            <a:off x="9464040" y="3465575"/>
+            <a:ext cx="1005840" cy="365760"/>
+          </a:xfrm>
+          <a:prstGeom prst="rect">
+            <a:avLst/>
+          </a:prstGeom>
+          <a:noFill/>
+        </p:spPr>
+        <p:txBody>
+          <a:bodyPr wrap="square" lIns="0" rIns="0" tIns="0" bIns="0" anchor="t">
+            <a:spAutoFit/>
+          </a:bodyPr>
+          <a:lstStyle/>
+          <a:p>
+            <a:pPr algn="r">
+              <a:lnSpc>
+                <a:spcPct val="135000"/>
+              </a:lnSpc>
+              <a:spcAft>
+                <a:spcPts val="0"/>
+              </a:spcAft>
+            </a:pPr>
+            <a:r>
+              <a:rPr sz="1300" b="0" i="0">
+                <a:solidFill>
+                  <a:srgbClr val="17130D"/>
+                </a:solidFill>
+                <a:latin typeface="Consolas"/>
+              </a:rPr>
+              <a:t>S$400</a:t>
+            </a:r>
+          </a:p>
+        </p:txBody>
+      </p:sp>
+      <p:sp>
+        <p:nvSpPr>
+          <p:cNvPr id="21" name="TextBox 20"/>
+          <p:cNvSpPr txBox="1"/>
+          <p:nvPr/>
+        </p:nvSpPr>
+        <p:spPr>
+          <a:xfrm>
+            <a:off x="10515600" y="3493007"/>
+            <a:ext cx="868680" cy="365760"/>
+          </a:xfrm>
+          <a:prstGeom prst="rect">
+            <a:avLst/>
+          </a:prstGeom>
+          <a:noFill/>
+        </p:spPr>
+        <p:txBody>
+          <a:bodyPr wrap="square" lIns="0" rIns="0" tIns="0" bIns="0" anchor="t">
+            <a:spAutoFit/>
+          </a:bodyPr>
+          <a:lstStyle/>
+          <a:p>
+            <a:pPr algn="r">
+              <a:lnSpc>
+                <a:spcPct val="135000"/>
+              </a:lnSpc>
+              <a:spcAft>
+                <a:spcPts val="0"/>
+              </a:spcAft>
+            </a:pPr>
+            <a:r>
+              <a:rPr sz="1100" b="0" i="0">
+                <a:solidFill>
+                  <a:srgbClr val="8C8467"/>
+                </a:solidFill>
+                <a:latin typeface="Segoe UI"/>
+              </a:rPr>
+              <a:t>total fee</a:t>
+            </a:r>
+          </a:p>
+        </p:txBody>
+      </p:sp>
+      <p:sp>
+        <p:nvSpPr>
+          <p:cNvPr id="22" name="Rectangle 21"/>
+          <p:cNvSpPr/>
+          <p:nvPr/>
+        </p:nvSpPr>
+        <p:spPr>
+          <a:xfrm>
+            <a:off x="7086600" y="3886199"/>
+            <a:ext cx="4297680" cy="4762"/>
+          </a:xfrm>
+          <a:prstGeom prst="rect">
+            <a:avLst/>
+          </a:prstGeom>
+          <a:solidFill>
+            <a:srgbClr val="E8E2D4"/>
+          </a:solidFill>
+          <a:ln>
+            <a:noFill/>
+          </a:ln>
+          <a:effectLst/>
+        </p:spPr>
+        <p:style>
+          <a:lnRef idx="1">
+            <a:schemeClr val="accent1"/>
+          </a:lnRef>
+          <a:fillRef idx="3">
+            <a:schemeClr val="accent1"/>
+          </a:fillRef>
+          <a:effectRef idx="2">
+            <a:schemeClr val="accent1"/>
+          </a:effectRef>
+          <a:fontRef idx="minor">
+            <a:schemeClr val="lt1"/>
+          </a:fontRef>
+        </p:style>
+        <p:txBody>
+          <a:bodyPr rtlCol="0" anchor="ctr"/>
+          <a:lstStyle/>
+          <a:p>
+            <a:pPr algn="ctr"/>
+          </a:p>
+        </p:txBody>
+      </p:sp>
+      <p:sp>
+        <p:nvSpPr>
+          <p:cNvPr id="23" name="Rectangle 22"/>
+          <p:cNvSpPr/>
+          <p:nvPr/>
+        </p:nvSpPr>
+        <p:spPr>
+          <a:xfrm>
+            <a:off x="777240" y="6199632"/>
+            <a:ext cx="10637215" cy="4762"/>
+          </a:xfrm>
+          <a:prstGeom prst="rect">
+            <a:avLst/>
+          </a:prstGeom>
+          <a:solidFill>
+            <a:srgbClr val="DED7C6"/>
+          </a:solidFill>
+          <a:ln>
+            <a:noFill/>
+          </a:ln>
+          <a:effectLst/>
+        </p:spPr>
+        <p:style>
+          <a:lnRef idx="1">
+            <a:schemeClr val="accent1"/>
+          </a:lnRef>
+          <a:fillRef idx="3">
+            <a:schemeClr val="accent1"/>
+          </a:fillRef>
+          <a:effectRef idx="2">
+            <a:schemeClr val="accent1"/>
+          </a:effectRef>
+          <a:fontRef idx="minor">
+            <a:schemeClr val="lt1"/>
+          </a:fontRef>
+        </p:style>
+        <p:txBody>
+          <a:bodyPr rtlCol="0" anchor="ctr"/>
+          <a:lstStyle/>
+          <a:p>
+            <a:pPr algn="ctr"/>
+          </a:p>
+        </p:txBody>
+      </p:sp>
+      <p:sp>
+        <p:nvSpPr>
+          <p:cNvPr id="24" name="TextBox 23"/>
+          <p:cNvSpPr txBox="1"/>
+          <p:nvPr/>
+        </p:nvSpPr>
+        <p:spPr>
+          <a:xfrm>
+            <a:off x="777240" y="6327648"/>
+            <a:ext cx="5318607" cy="274320"/>
+          </a:xfrm>
+          <a:prstGeom prst="rect">
+            <a:avLst/>
+          </a:prstGeom>
+          <a:noFill/>
+        </p:spPr>
+        <p:txBody>
+          <a:bodyPr wrap="square" lIns="0" rIns="0" tIns="0" bIns="0" anchor="t">
+            <a:spAutoFit/>
+          </a:bodyPr>
+          <a:lstStyle/>
+          <a:p>
+            <a:pPr algn="l">
+              <a:lnSpc>
+                <a:spcPct val="135000"/>
+              </a:lnSpc>
+              <a:spcAft>
+                <a:spcPts val="0"/>
+              </a:spcAft>
+            </a:pPr>
+            <a:r>
+              <a:rPr sz="950" b="0" i="0" spc="12">
+                <a:solidFill>
+                  <a:srgbClr val="8C8467"/>
+                </a:solidFill>
+                <a:latin typeface="Consolas"/>
+              </a:rPr>
+              <a:t>KIRIM</a:t>
+            </a:r>
+          </a:p>
+        </p:txBody>
+      </p:sp>
+      <p:sp>
+        <p:nvSpPr>
+          <p:cNvPr id="25" name="TextBox 24"/>
+          <p:cNvSpPr txBox="1"/>
+          <p:nvPr/>
+        </p:nvSpPr>
+        <p:spPr>
+          <a:xfrm>
+            <a:off x="6095847" y="6327648"/>
+            <a:ext cx="5318607" cy="274320"/>
+          </a:xfrm>
+          <a:prstGeom prst="rect">
+            <a:avLst/>
+          </a:prstGeom>
+          <a:noFill/>
+        </p:spPr>
+        <p:txBody>
+          <a:bodyPr wrap="square" lIns="0" rIns="0" tIns="0" bIns="0" anchor="t">
+            <a:spAutoFit/>
+          </a:bodyPr>
+          <a:lstStyle/>
+          <a:p>
+            <a:pPr algn="r">
+              <a:lnSpc>
+                <a:spcPct val="135000"/>
+              </a:lnSpc>
+              <a:spcAft>
+                <a:spcPts val="0"/>
+              </a:spcAft>
+            </a:pPr>
+            <a:r>
+              <a:rPr sz="950" b="0" i="0" spc="12">
+                <a:solidFill>
+                  <a:srgbClr val="8C8467"/>
+                </a:solidFill>
+                <a:latin typeface="Consolas"/>
+              </a:rPr>
+              <a:t>13 / BUSINESS</a:t>
+            </a:r>
+          </a:p>
+        </p:txBody>
+      </p:sp>
+    </p:spTree>
+  </p:cSld>
+  <p:clrMapOvr>
+    <a:masterClrMapping/>
+  </p:clrMapOvr>
+</p:sld>
+</file>
+
+<file path=ppt/slides/slide15.xml><?xml version="1.0" encoding="utf-8"?>
 <p:sld xmlns:a="http://schemas.openxmlformats.org/drawingml/2006/main" xmlns:p="http://schemas.openxmlformats.org/presentationml/2006/main" xmlns:r="http://schemas.openxmlformats.org/officeDocument/2006/relationships">
   <p:cSld>
     <p:spTree>

--- a/deck/KIRIM-pitch-deck.pptx
+++ b/deck/KIRIM-pitch-deck.pptx
@@ -6660,7 +6660,7 @@
                 </a:solidFill>
                 <a:latin typeface="Georgia"/>
               </a:rPr>
-              <a:t>“The client approved” is a signature, not a checkbox.</a:t>
+              <a:t>“The buyer approved” is a signature, not a checkbox.</a:t>
             </a:r>
           </a:p>
         </p:txBody>
@@ -6702,7 +6702,7 @@
                 </a:solidFill>
                 <a:latin typeface="Segoe UI"/>
               </a:rPr>
-              <a:t>Below Sarah's own ceiling the agent releases on its own. Above it, the evidence is examined and the money waits for her — and approval means an XRPL payment from her own wallet carrying a memo naming the milestone.</a:t>
+              <a:t>Below the buyer's own ceiling the agent releases on its own. Above it, the evidence is examined and the money waits for her — and approval means an XRPL payment from her own wallet carrying a memo naming the milestone.</a:t>
             </a:r>
           </a:p>
           <a:p>
@@ -9462,7 +9462,7 @@
                 </a:solidFill>
                 <a:latin typeface="Segoe UI"/>
               </a:rPr>
-              <a:t>per milestone</a:t>
+              <a:t>per stage</a:t>
             </a:r>
           </a:p>
         </p:txBody>
@@ -9548,7 +9548,7 @@
                 </a:solidFill>
                 <a:latin typeface="Segoe UI"/>
               </a:rPr>
-              <a:t>On a S$50,000 renovation</a:t>
+              <a:t>On a US$280,000 apartment</a:t>
             </a:r>
           </a:p>
         </p:txBody>
@@ -9590,7 +9590,7 @@
                 </a:solidFill>
                 <a:latin typeface="Consolas"/>
               </a:rPr>
-              <a:t>S$400</a:t>
+              <a:t>US$2,240</a:t>
             </a:r>
           </a:p>
         </p:txBody>
@@ -9632,7 +9632,7 @@
                 </a:solidFill>
                 <a:latin typeface="Segoe UI"/>
               </a:rPr>
-              <a:t>total fee</a:t>
+              <a:t>across six stages</a:t>
             </a:r>
           </a:p>
         </p:txBody>
@@ -10295,7 +10295,7 @@
                 </a:solidFill>
                 <a:latin typeface="Georgia"/>
               </a:rPr>
-              <a:t>Renovation runs on a deposit and a hope.</a:t>
+              <a:t>Pre-sale runs on a deposit and a hope.</a:t>
             </a:r>
           </a:p>
         </p:txBody>
@@ -10337,7 +10337,7 @@
                 </a:solidFill>
                 <a:latin typeface="Segoe UI"/>
               </a:rPr>
-              <a:t>A homeowner pays a large deposit before meaningful work exists. From that moment the contractor holds the money and the client holds the risk.</a:t>
+              <a:t>A buyer pays a deposit, and a bank pays the whole mortgage, before meaningful work exists. From that moment the developer holds the money and the buyer holds the risk.</a:t>
             </a:r>
           </a:p>
           <a:p>
